--- a/docs/presentation_deck.pptx
+++ b/docs/presentation_deck.pptx
@@ -3171,8 +3171,9 @@
                 <a:solidFill>
                   <a:srgbClr val="CBD5E1"/>
                 </a:solidFill>
-                <a:latin typeface="맑은 고딕"/>
-                <a:ea typeface="맑은 고딕"/>
+                <a:latin typeface="Arial"/>
+                <a:ea typeface="맑은 고딕"/>
+                <a:cs typeface="Arial"/>
               </a:rPr>
               <a:t>2026-1 Web Programming · Final Project</a:t>
             </a:r>
@@ -3207,8 +3208,9 @@
                 <a:solidFill>
                   <a:srgbClr val="FFFFFF"/>
                 </a:solidFill>
-                <a:latin typeface="맑은 고딕"/>
-                <a:ea typeface="맑은 고딕"/>
+                <a:latin typeface="Arial"/>
+                <a:ea typeface="맑은 고딕"/>
+                <a:cs typeface="Arial"/>
               </a:rPr>
               <a:t>PlanIt</a:t>
             </a:r>
@@ -3243,8 +3245,9 @@
                 <a:solidFill>
                   <a:srgbClr val="F59E0B"/>
                 </a:solidFill>
-                <a:latin typeface="맑은 고딕"/>
-                <a:ea typeface="맑은 고딕"/>
+                <a:latin typeface="Arial"/>
+                <a:ea typeface="맑은 고딕"/>
+                <a:cs typeface="Arial"/>
               </a:rPr>
               <a:t>할 일 + 일정 통합 관리 웹 서비스</a:t>
             </a:r>
@@ -3279,8 +3282,9 @@
                 <a:solidFill>
                   <a:srgbClr val="CBD5E1"/>
                 </a:solidFill>
-                <a:latin typeface="맑은 고딕"/>
-                <a:ea typeface="맑은 고딕"/>
+                <a:latin typeface="Arial"/>
+                <a:ea typeface="맑은 고딕"/>
+                <a:cs typeface="Arial"/>
               </a:rPr>
               <a:t>대학생을 위한 단일 인터페이스 · React + Express + PostgreSQL · Docker · Nginx · CI/CD</a:t>
             </a:r>
@@ -3315,8 +3319,9 @@
                 <a:solidFill>
                   <a:srgbClr val="FFFFFF"/>
                 </a:solidFill>
-                <a:latin typeface="맑은 고딕"/>
-                <a:ea typeface="맑은 고딕"/>
+                <a:latin typeface="Arial"/>
+                <a:ea typeface="맑은 고딕"/>
+                <a:cs typeface="Arial"/>
               </a:rPr>
               <a:t>컴퓨터공학부 · 202100580 · 이정</a:t>
             </a:r>
@@ -3412,8 +3417,9 @@
                 <a:solidFill>
                   <a:srgbClr val="FFFFFF"/>
                 </a:solidFill>
-                <a:latin typeface="맑은 고딕"/>
-                <a:ea typeface="맑은 고딕"/>
+                <a:latin typeface="Arial"/>
+                <a:ea typeface="맑은 고딕"/>
+                <a:cs typeface="Arial"/>
               </a:rPr>
               <a:t>CI/CD 자동 배포 파이프라인</a:t>
             </a:r>
@@ -3448,8 +3454,9 @@
                 <a:solidFill>
                   <a:srgbClr val="CBD5E1"/>
                 </a:solidFill>
-                <a:latin typeface="맑은 고딕"/>
-                <a:ea typeface="맑은 고딕"/>
+                <a:latin typeface="Arial"/>
+                <a:ea typeface="맑은 고딕"/>
+                <a:cs typeface="Arial"/>
               </a:rPr>
               <a:t>조건 ① — git push → 자동 빌드 · 자동 배포</a:t>
             </a:r>
@@ -3484,8 +3491,9 @@
                 <a:solidFill>
                   <a:srgbClr val="CBD5E1"/>
                 </a:solidFill>
-                <a:latin typeface="맑은 고딕"/>
-                <a:ea typeface="맑은 고딕"/>
+                <a:latin typeface="Arial"/>
+                <a:ea typeface="맑은 고딕"/>
+                <a:cs typeface="Arial"/>
               </a:rPr>
               <a:t>10 / 13</a:t>
             </a:r>
@@ -3500,7 +3508,7 @@
         </p:nvSpPr>
         <p:spPr>
           <a:xfrm>
-            <a:off x="548640" y="1051560"/>
+            <a:off x="548640" y="1005840"/>
             <a:ext cx="11064240" cy="365760"/>
           </a:xfrm>
           <a:prstGeom prst="rect">
@@ -3520,8 +3528,9 @@
                 <a:solidFill>
                   <a:srgbClr val="1D4ED8"/>
                 </a:solidFill>
-                <a:latin typeface="맑은 고딕"/>
-                <a:ea typeface="맑은 고딕"/>
+                <a:latin typeface="Arial"/>
+                <a:ea typeface="맑은 고딕"/>
+                <a:cs typeface="Arial"/>
               </a:rPr>
               <a:t>git push origin main</a:t>
             </a:r>
@@ -3536,7 +3545,7 @@
         </p:nvSpPr>
         <p:spPr>
           <a:xfrm>
-            <a:off x="548640" y="1554480"/>
+            <a:off x="548640" y="1691640"/>
             <a:ext cx="3566160" cy="1920240"/>
           </a:xfrm>
           <a:prstGeom prst="roundRect">
@@ -3581,8 +3590,8 @@
         </p:nvSpPr>
         <p:spPr>
           <a:xfrm>
-            <a:off x="731520" y="1737360"/>
-            <a:ext cx="3200400" cy="731520"/>
+            <a:off x="731520" y="1828800"/>
+            <a:ext cx="3200400" cy="411480"/>
           </a:xfrm>
           <a:prstGeom prst="rect">
             <a:avLst/>
@@ -3597,15 +3606,15 @@
           <a:p>
             <a:pPr algn="ctr"/>
             <a:r>
-              <a:rPr sz="1400" b="1" i="0">
+              <a:rPr sz="1500" b="1" i="0">
                 <a:solidFill>
                   <a:srgbClr val="1D4ED8"/>
                 </a:solidFill>
-                <a:latin typeface="맑은 고딕"/>
-                <a:ea typeface="맑은 고딕"/>
-              </a:rPr>
-              <a:t>GitHub Actions
-ci.yml</a:t>
+                <a:latin typeface="Arial"/>
+                <a:ea typeface="맑은 고딕"/>
+                <a:cs typeface="Arial"/>
+              </a:rPr>
+              <a:t>GitHub Actions</a:t>
             </a:r>
           </a:p>
         </p:txBody>
@@ -3618,7 +3627,44 @@
         </p:nvSpPr>
         <p:spPr>
           <a:xfrm>
-            <a:off x="731520" y="2514600"/>
+            <a:off x="731520" y="2258568"/>
+            <a:ext cx="3200400" cy="320040"/>
+          </a:xfrm>
+          <a:prstGeom prst="rect">
+            <a:avLst/>
+          </a:prstGeom>
+          <a:noFill/>
+        </p:spPr>
+        <p:txBody>
+          <a:bodyPr wrap="square" lIns="0" rIns="0" tIns="0" bIns="0" anchor="t">
+            <a:spAutoFit/>
+          </a:bodyPr>
+          <a:lstStyle/>
+          <a:p>
+            <a:pPr algn="ctr"/>
+            <a:r>
+              <a:rPr sz="1100" b="0" i="1">
+                <a:solidFill>
+                  <a:srgbClr val="475569"/>
+                </a:solidFill>
+                <a:latin typeface="Arial"/>
+                <a:ea typeface="맑은 고딕"/>
+                <a:cs typeface="Arial"/>
+              </a:rPr>
+              <a:t>ci.yml</a:t>
+            </a:r>
+          </a:p>
+        </p:txBody>
+      </p:sp>
+      <p:sp>
+        <p:nvSpPr>
+          <p:cNvPr id="10" name="TextBox 9"/>
+          <p:cNvSpPr txBox="1"/>
+          <p:nvPr/>
+        </p:nvSpPr>
+        <p:spPr>
+          <a:xfrm>
+            <a:off x="731520" y="2651760"/>
             <a:ext cx="3200400" cy="868680"/>
           </a:xfrm>
           <a:prstGeom prst="rect">
@@ -3638,8 +3684,9 @@
                 <a:solidFill>
                   <a:srgbClr val="0F172A"/>
                 </a:solidFill>
-                <a:latin typeface="맑은 고딕"/>
-                <a:ea typeface="맑은 고딕"/>
+                <a:latin typeface="Arial"/>
+                <a:ea typeface="맑은 고딕"/>
+                <a:cs typeface="Arial"/>
               </a:rPr>
               <a:t>server / client / docker compose
 빌드 + node --check + dist 아티팩트</a:t>
@@ -3649,13 +3696,13 @@
       </p:sp>
       <p:sp>
         <p:nvSpPr>
-          <p:cNvPr id="10" name="Rounded Rectangle 9"/>
+          <p:cNvPr id="11" name="Rounded Rectangle 10"/>
           <p:cNvSpPr/>
           <p:nvPr/>
         </p:nvSpPr>
         <p:spPr>
           <a:xfrm>
-            <a:off x="4297680" y="1554480"/>
+            <a:off x="4297680" y="1691640"/>
             <a:ext cx="3566160" cy="1920240"/>
           </a:xfrm>
           <a:prstGeom prst="roundRect">
@@ -3694,14 +3741,14 @@
       </p:sp>
       <p:sp>
         <p:nvSpPr>
-          <p:cNvPr id="11" name="TextBox 10"/>
-          <p:cNvSpPr txBox="1"/>
-          <p:nvPr/>
-        </p:nvSpPr>
-        <p:spPr>
-          <a:xfrm>
-            <a:off x="4480560" y="1737360"/>
-            <a:ext cx="3200400" cy="731520"/>
+          <p:cNvPr id="12" name="TextBox 11"/>
+          <p:cNvSpPr txBox="1"/>
+          <p:nvPr/>
+        </p:nvSpPr>
+        <p:spPr>
+          <a:xfrm>
+            <a:off x="4480560" y="1828800"/>
+            <a:ext cx="3200400" cy="411480"/>
           </a:xfrm>
           <a:prstGeom prst="rect">
             <a:avLst/>
@@ -3716,28 +3763,65 @@
           <a:p>
             <a:pPr algn="ctr"/>
             <a:r>
-              <a:rPr sz="1400" b="1" i="0">
+              <a:rPr sz="1500" b="1" i="0">
                 <a:solidFill>
                   <a:srgbClr val="F59E0B"/>
                 </a:solidFill>
-                <a:latin typeface="맑은 고딕"/>
-                <a:ea typeface="맑은 고딕"/>
-              </a:rPr>
-              <a:t>Vercel
-GitHub 연동</a:t>
-            </a:r>
-          </a:p>
-        </p:txBody>
-      </p:sp>
-      <p:sp>
-        <p:nvSpPr>
-          <p:cNvPr id="12" name="TextBox 11"/>
-          <p:cNvSpPr txBox="1"/>
-          <p:nvPr/>
-        </p:nvSpPr>
-        <p:spPr>
-          <a:xfrm>
-            <a:off x="4480560" y="2514600"/>
+                <a:latin typeface="Arial"/>
+                <a:ea typeface="맑은 고딕"/>
+                <a:cs typeface="Arial"/>
+              </a:rPr>
+              <a:t>Vercel</a:t>
+            </a:r>
+          </a:p>
+        </p:txBody>
+      </p:sp>
+      <p:sp>
+        <p:nvSpPr>
+          <p:cNvPr id="13" name="TextBox 12"/>
+          <p:cNvSpPr txBox="1"/>
+          <p:nvPr/>
+        </p:nvSpPr>
+        <p:spPr>
+          <a:xfrm>
+            <a:off x="4480560" y="2258568"/>
+            <a:ext cx="3200400" cy="320040"/>
+          </a:xfrm>
+          <a:prstGeom prst="rect">
+            <a:avLst/>
+          </a:prstGeom>
+          <a:noFill/>
+        </p:spPr>
+        <p:txBody>
+          <a:bodyPr wrap="square" lIns="0" rIns="0" tIns="0" bIns="0" anchor="t">
+            <a:spAutoFit/>
+          </a:bodyPr>
+          <a:lstStyle/>
+          <a:p>
+            <a:pPr algn="ctr"/>
+            <a:r>
+              <a:rPr sz="1100" b="0" i="1">
+                <a:solidFill>
+                  <a:srgbClr val="475569"/>
+                </a:solidFill>
+                <a:latin typeface="Arial"/>
+                <a:ea typeface="맑은 고딕"/>
+                <a:cs typeface="Arial"/>
+              </a:rPr>
+              <a:t>GitHub 연동</a:t>
+            </a:r>
+          </a:p>
+        </p:txBody>
+      </p:sp>
+      <p:sp>
+        <p:nvSpPr>
+          <p:cNvPr id="14" name="TextBox 13"/>
+          <p:cNvSpPr txBox="1"/>
+          <p:nvPr/>
+        </p:nvSpPr>
+        <p:spPr>
+          <a:xfrm>
+            <a:off x="4480560" y="2651760"/>
             <a:ext cx="3200400" cy="868680"/>
           </a:xfrm>
           <a:prstGeom prst="rect">
@@ -3757,8 +3841,9 @@
                 <a:solidFill>
                   <a:srgbClr val="0F172A"/>
                 </a:solidFill>
-                <a:latin typeface="맑은 고딕"/>
-                <a:ea typeface="맑은 고딕"/>
+                <a:latin typeface="Arial"/>
+                <a:ea typeface="맑은 고딕"/>
+                <a:cs typeface="Arial"/>
               </a:rPr>
               <a:t>client/ 자동 감지
 빌드 + Edge 배포 + alias 유지</a:t>
@@ -3768,13 +3853,13 @@
       </p:sp>
       <p:sp>
         <p:nvSpPr>
-          <p:cNvPr id="13" name="Rounded Rectangle 12"/>
+          <p:cNvPr id="15" name="Rounded Rectangle 14"/>
           <p:cNvSpPr/>
           <p:nvPr/>
         </p:nvSpPr>
         <p:spPr>
           <a:xfrm>
-            <a:off x="8046720" y="1554480"/>
+            <a:off x="8046720" y="1691640"/>
             <a:ext cx="3566160" cy="1920240"/>
           </a:xfrm>
           <a:prstGeom prst="roundRect">
@@ -3813,14 +3898,14 @@
       </p:sp>
       <p:sp>
         <p:nvSpPr>
-          <p:cNvPr id="14" name="TextBox 13"/>
-          <p:cNvSpPr txBox="1"/>
-          <p:nvPr/>
-        </p:nvSpPr>
-        <p:spPr>
-          <a:xfrm>
-            <a:off x="8229600" y="1737360"/>
-            <a:ext cx="3200400" cy="731520"/>
+          <p:cNvPr id="16" name="TextBox 15"/>
+          <p:cNvSpPr txBox="1"/>
+          <p:nvPr/>
+        </p:nvSpPr>
+        <p:spPr>
+          <a:xfrm>
+            <a:off x="8229600" y="1828800"/>
+            <a:ext cx="3200400" cy="411480"/>
           </a:xfrm>
           <a:prstGeom prst="rect">
             <a:avLst/>
@@ -3835,28 +3920,65 @@
           <a:p>
             <a:pPr algn="ctr"/>
             <a:r>
-              <a:rPr sz="1400" b="1" i="0">
+              <a:rPr sz="1500" b="1" i="0">
                 <a:solidFill>
                   <a:srgbClr val="10B981"/>
                 </a:solidFill>
-                <a:latin typeface="맑은 고딕"/>
-                <a:ea typeface="맑은 고딕"/>
-              </a:rPr>
-              <a:t>Render
-autoDeploy: yes</a:t>
-            </a:r>
-          </a:p>
-        </p:txBody>
-      </p:sp>
-      <p:sp>
-        <p:nvSpPr>
-          <p:cNvPr id="15" name="TextBox 14"/>
-          <p:cNvSpPr txBox="1"/>
-          <p:nvPr/>
-        </p:nvSpPr>
-        <p:spPr>
-          <a:xfrm>
-            <a:off x="8229600" y="2514600"/>
+                <a:latin typeface="Arial"/>
+                <a:ea typeface="맑은 고딕"/>
+                <a:cs typeface="Arial"/>
+              </a:rPr>
+              <a:t>Render</a:t>
+            </a:r>
+          </a:p>
+        </p:txBody>
+      </p:sp>
+      <p:sp>
+        <p:nvSpPr>
+          <p:cNvPr id="17" name="TextBox 16"/>
+          <p:cNvSpPr txBox="1"/>
+          <p:nvPr/>
+        </p:nvSpPr>
+        <p:spPr>
+          <a:xfrm>
+            <a:off x="8229600" y="2258568"/>
+            <a:ext cx="3200400" cy="320040"/>
+          </a:xfrm>
+          <a:prstGeom prst="rect">
+            <a:avLst/>
+          </a:prstGeom>
+          <a:noFill/>
+        </p:spPr>
+        <p:txBody>
+          <a:bodyPr wrap="square" lIns="0" rIns="0" tIns="0" bIns="0" anchor="t">
+            <a:spAutoFit/>
+          </a:bodyPr>
+          <a:lstStyle/>
+          <a:p>
+            <a:pPr algn="ctr"/>
+            <a:r>
+              <a:rPr sz="1100" b="0" i="1">
+                <a:solidFill>
+                  <a:srgbClr val="475569"/>
+                </a:solidFill>
+                <a:latin typeface="Arial"/>
+                <a:ea typeface="맑은 고딕"/>
+                <a:cs typeface="Arial"/>
+              </a:rPr>
+              <a:t>autoDeploy: yes</a:t>
+            </a:r>
+          </a:p>
+        </p:txBody>
+      </p:sp>
+      <p:sp>
+        <p:nvSpPr>
+          <p:cNvPr id="18" name="TextBox 17"/>
+          <p:cNvSpPr txBox="1"/>
+          <p:nvPr/>
+        </p:nvSpPr>
+        <p:spPr>
+          <a:xfrm>
+            <a:off x="8229600" y="2651760"/>
             <a:ext cx="3200400" cy="868680"/>
           </a:xfrm>
           <a:prstGeom prst="rect">
@@ -3876,8 +3998,9 @@
                 <a:solidFill>
                   <a:srgbClr val="0F172A"/>
                 </a:solidFill>
-                <a:latin typeface="맑은 고딕"/>
-                <a:ea typeface="맑은 고딕"/>
+                <a:latin typeface="Arial"/>
+                <a:ea typeface="맑은 고딕"/>
+                <a:cs typeface="Arial"/>
               </a:rPr>
               <a:t>server/Dockerfile 자동 감지
 빌드 + migrate deploy + 컨테이너 부팅</a:t>
@@ -3887,14 +4010,14 @@
       </p:sp>
       <p:cxnSp>
         <p:nvCxnSpPr>
-          <p:cNvPr id="16" name="Connector 15"/>
+          <p:cNvPr id="19" name="Connector 18"/>
           <p:cNvCxnSpPr/>
           <p:nvPr/>
         </p:nvCxnSpPr>
         <p:spPr>
           <a:xfrm>
-            <a:off x="2331720" y="1325880"/>
-            <a:ext cx="0" cy="228600"/>
+            <a:off x="2331720" y="1417320"/>
+            <a:ext cx="0" cy="274320"/>
           </a:xfrm>
           <a:prstGeom prst="line">
             <a:avLst/>
@@ -3923,14 +4046,14 @@
       </p:cxnSp>
       <p:cxnSp>
         <p:nvCxnSpPr>
-          <p:cNvPr id="17" name="Connector 16"/>
+          <p:cNvPr id="20" name="Connector 19"/>
           <p:cNvCxnSpPr/>
           <p:nvPr/>
         </p:nvCxnSpPr>
         <p:spPr>
           <a:xfrm>
-            <a:off x="6080760" y="1325880"/>
-            <a:ext cx="0" cy="228600"/>
+            <a:off x="6080760" y="1417320"/>
+            <a:ext cx="0" cy="274320"/>
           </a:xfrm>
           <a:prstGeom prst="line">
             <a:avLst/>
@@ -3959,14 +4082,14 @@
       </p:cxnSp>
       <p:cxnSp>
         <p:nvCxnSpPr>
-          <p:cNvPr id="18" name="Connector 17"/>
+          <p:cNvPr id="21" name="Connector 20"/>
           <p:cNvCxnSpPr/>
           <p:nvPr/>
         </p:nvCxnSpPr>
         <p:spPr>
           <a:xfrm>
-            <a:off x="9829800" y="1325880"/>
-            <a:ext cx="0" cy="228600"/>
+            <a:off x="9829800" y="1417320"/>
+            <a:ext cx="0" cy="274320"/>
           </a:xfrm>
           <a:prstGeom prst="line">
             <a:avLst/>
@@ -3995,7 +4118,7 @@
       </p:cxnSp>
       <p:sp>
         <p:nvSpPr>
-          <p:cNvPr id="19" name="Rounded Rectangle 18"/>
+          <p:cNvPr id="22" name="Rounded Rectangle 21"/>
           <p:cNvSpPr/>
           <p:nvPr/>
         </p:nvSpPr>
@@ -4040,7 +4163,7 @@
       </p:sp>
       <p:sp>
         <p:nvSpPr>
-          <p:cNvPr id="20" name="TextBox 19"/>
+          <p:cNvPr id="23" name="TextBox 22"/>
           <p:cNvSpPr txBox="1"/>
           <p:nvPr/>
         </p:nvSpPr>
@@ -4066,8 +4189,9 @@
                 <a:solidFill>
                   <a:srgbClr val="1D4ED8"/>
                 </a:solidFill>
-                <a:latin typeface="맑은 고딕"/>
-                <a:ea typeface="맑은 고딕"/>
+                <a:latin typeface="Arial"/>
+                <a:ea typeface="맑은 고딕"/>
+                <a:cs typeface="Arial"/>
               </a:rPr>
               <a:t>📋 ci.yml 작업 (PR &amp; main push 시)</a:t>
             </a:r>
@@ -4076,7 +4200,7 @@
       </p:sp>
       <p:sp>
         <p:nvSpPr>
-          <p:cNvPr id="21" name="TextBox 20"/>
+          <p:cNvPr id="24" name="TextBox 23"/>
           <p:cNvSpPr txBox="1"/>
           <p:nvPr/>
         </p:nvSpPr>
@@ -4106,8 +4230,9 @@
                 <a:solidFill>
                   <a:srgbClr val="1D4ED8"/>
                 </a:solidFill>
-                <a:latin typeface="맑은 고딕"/>
-                <a:ea typeface="맑은 고딕"/>
+                <a:latin typeface="Arial"/>
+                <a:ea typeface="맑은 고딕"/>
+                <a:cs typeface="Arial"/>
               </a:rPr>
               <a:t>server  </a:t>
             </a:r>
@@ -4116,8 +4241,9 @@
                 <a:solidFill>
                   <a:srgbClr val="0F172A"/>
                 </a:solidFill>
-                <a:latin typeface="맑은 고딕"/>
-                <a:ea typeface="맑은 고딕"/>
+                <a:latin typeface="Arial"/>
+                <a:ea typeface="맑은 고딕"/>
+                <a:cs typeface="Arial"/>
               </a:rPr>
               <a:t>npm ci + prisma generate + node --check</a:t>
             </a:r>
@@ -4133,8 +4259,9 @@
                 <a:solidFill>
                   <a:srgbClr val="1D4ED8"/>
                 </a:solidFill>
-                <a:latin typeface="맑은 고딕"/>
-                <a:ea typeface="맑은 고딕"/>
+                <a:latin typeface="Arial"/>
+                <a:ea typeface="맑은 고딕"/>
+                <a:cs typeface="Arial"/>
               </a:rPr>
               <a:t>client  </a:t>
             </a:r>
@@ -4143,8 +4270,9 @@
                 <a:solidFill>
                   <a:srgbClr val="0F172A"/>
                 </a:solidFill>
-                <a:latin typeface="맑은 고딕"/>
-                <a:ea typeface="맑은 고딕"/>
+                <a:latin typeface="Arial"/>
+                <a:ea typeface="맑은 고딕"/>
+                <a:cs typeface="Arial"/>
               </a:rPr>
               <a:t>npm ci + vite build + dist 아티팩트 업로드</a:t>
             </a:r>
@@ -4160,8 +4288,9 @@
                 <a:solidFill>
                   <a:srgbClr val="1D4ED8"/>
                 </a:solidFill>
-                <a:latin typeface="맑은 고딕"/>
-                <a:ea typeface="맑은 고딕"/>
+                <a:latin typeface="Arial"/>
+                <a:ea typeface="맑은 고딕"/>
+                <a:cs typeface="Arial"/>
               </a:rPr>
               <a:t>docker  </a:t>
             </a:r>
@@ -4170,8 +4299,9 @@
                 <a:solidFill>
                   <a:srgbClr val="0F172A"/>
                 </a:solidFill>
-                <a:latin typeface="맑은 고딕"/>
-                <a:ea typeface="맑은 고딕"/>
+                <a:latin typeface="Arial"/>
+                <a:ea typeface="맑은 고딕"/>
+                <a:cs typeface="Arial"/>
               </a:rPr>
               <a:t>docker compose build 전체 검증</a:t>
             </a:r>
@@ -4187,8 +4317,9 @@
                 <a:solidFill>
                   <a:srgbClr val="1D4ED8"/>
                 </a:solidFill>
-                <a:latin typeface="맑은 고딕"/>
-                <a:ea typeface="맑은 고딕"/>
+                <a:latin typeface="Arial"/>
+                <a:ea typeface="맑은 고딕"/>
+                <a:cs typeface="Arial"/>
               </a:rPr>
               <a:t>CodeRabbit  </a:t>
             </a:r>
@@ -4197,8 +4328,9 @@
                 <a:solidFill>
                   <a:srgbClr val="0F172A"/>
                 </a:solidFill>
-                <a:latin typeface="맑은 고딕"/>
-                <a:ea typeface="맑은 고딕"/>
+                <a:latin typeface="Arial"/>
+                <a:ea typeface="맑은 고딕"/>
+                <a:cs typeface="Arial"/>
               </a:rPr>
               <a:t>PR 자동 코드 리뷰 (선택)</a:t>
             </a:r>
@@ -4207,7 +4339,7 @@
       </p:sp>
       <p:sp>
         <p:nvSpPr>
-          <p:cNvPr id="22" name="Rounded Rectangle 21"/>
+          <p:cNvPr id="25" name="Rounded Rectangle 24"/>
           <p:cNvSpPr/>
           <p:nvPr/>
         </p:nvSpPr>
@@ -4252,7 +4384,7 @@
       </p:sp>
       <p:sp>
         <p:nvSpPr>
-          <p:cNvPr id="23" name="TextBox 22"/>
+          <p:cNvPr id="26" name="TextBox 25"/>
           <p:cNvSpPr txBox="1"/>
           <p:nvPr/>
         </p:nvSpPr>
@@ -4278,8 +4410,9 @@
                 <a:solidFill>
                   <a:srgbClr val="10B981"/>
                 </a:solidFill>
-                <a:latin typeface="맑은 고딕"/>
-                <a:ea typeface="맑은 고딕"/>
+                <a:latin typeface="Arial"/>
+                <a:ea typeface="맑은 고딕"/>
+                <a:cs typeface="Arial"/>
               </a:rPr>
               <a:t>🚀 자동 배포 흐름</a:t>
             </a:r>
@@ -4288,7 +4421,7 @@
       </p:sp>
       <p:sp>
         <p:nvSpPr>
-          <p:cNvPr id="24" name="TextBox 23"/>
+          <p:cNvPr id="27" name="TextBox 26"/>
           <p:cNvSpPr txBox="1"/>
           <p:nvPr/>
         </p:nvSpPr>
@@ -4318,8 +4451,9 @@
                 <a:solidFill>
                   <a:srgbClr val="0F172A"/>
                 </a:solidFill>
-                <a:latin typeface="맑은 고딕"/>
-                <a:ea typeface="맑은 고딕"/>
+                <a:latin typeface="Arial"/>
+                <a:ea typeface="맑은 고딕"/>
+                <a:cs typeface="Arial"/>
               </a:rPr>
               <a:t>•  main 머지 → Vercel/Render 가 GitHub Webhook 으로 감지</a:t>
             </a:r>
@@ -4335,8 +4469,9 @@
                 <a:solidFill>
                   <a:srgbClr val="0F172A"/>
                 </a:solidFill>
-                <a:latin typeface="맑은 고딕"/>
-                <a:ea typeface="맑은 고딕"/>
+                <a:latin typeface="Arial"/>
+                <a:ea typeface="맑은 고딕"/>
+                <a:cs typeface="Arial"/>
               </a:rPr>
               <a:t>•  프런트: Vercel Edge 글로벌 배포 (≈ 30초)</a:t>
             </a:r>
@@ -4352,8 +4487,9 @@
                 <a:solidFill>
                   <a:srgbClr val="0F172A"/>
                 </a:solidFill>
-                <a:latin typeface="맑은 고딕"/>
-                <a:ea typeface="맑은 고딕"/>
+                <a:latin typeface="Arial"/>
+                <a:ea typeface="맑은 고딕"/>
+                <a:cs typeface="Arial"/>
               </a:rPr>
               <a:t>•  백엔드: Render 가 Docker 이미지 빌드 + 마이그레이션 자동 적용</a:t>
             </a:r>
@@ -4369,8 +4505,9 @@
                 <a:solidFill>
                   <a:srgbClr val="0F172A"/>
                 </a:solidFill>
-                <a:latin typeface="맑은 고딕"/>
-                <a:ea typeface="맑은 고딕"/>
+                <a:latin typeface="Arial"/>
+                <a:ea typeface="맑은 고딕"/>
+                <a:cs typeface="Arial"/>
               </a:rPr>
               <a:t>•  결과: 4개 PR 머지 모두 무중단으로 운영 반영</a:t>
             </a:r>
@@ -4379,7 +4516,7 @@
       </p:sp>
       <p:sp>
         <p:nvSpPr>
-          <p:cNvPr id="25" name="TextBox 24"/>
+          <p:cNvPr id="28" name="TextBox 27"/>
           <p:cNvSpPr txBox="1"/>
           <p:nvPr/>
         </p:nvSpPr>
@@ -4405,8 +4542,9 @@
                 <a:solidFill>
                   <a:srgbClr val="475569"/>
                 </a:solidFill>
-                <a:latin typeface="맑은 고딕"/>
-                <a:ea typeface="맑은 고딕"/>
+                <a:latin typeface="Arial"/>
+                <a:ea typeface="맑은 고딕"/>
+                <a:cs typeface="Arial"/>
               </a:rPr>
               <a:t>PlanIt — 2026-1 Web Programming Final Project · 202100580 이정</a:t>
             </a:r>
@@ -4415,7 +4553,7 @@
       </p:sp>
       <p:sp>
         <p:nvSpPr>
-          <p:cNvPr id="26" name="TextBox 25"/>
+          <p:cNvPr id="29" name="TextBox 28"/>
           <p:cNvSpPr txBox="1"/>
           <p:nvPr/>
         </p:nvSpPr>
@@ -4441,8 +4579,9 @@
                 <a:solidFill>
                   <a:srgbClr val="475569"/>
                 </a:solidFill>
-                <a:latin typeface="맑은 고딕"/>
-                <a:ea typeface="맑은 고딕"/>
+                <a:latin typeface="Arial"/>
+                <a:ea typeface="맑은 고딕"/>
+                <a:cs typeface="Arial"/>
               </a:rPr>
               <a:t>10 / 13</a:t>
             </a:r>
@@ -4538,8 +4677,9 @@
                 <a:solidFill>
                   <a:srgbClr val="FFFFFF"/>
                 </a:solidFill>
-                <a:latin typeface="맑은 고딕"/>
-                <a:ea typeface="맑은 고딕"/>
+                <a:latin typeface="Arial"/>
+                <a:ea typeface="맑은 고딕"/>
+                <a:cs typeface="Arial"/>
               </a:rPr>
               <a:t>보안 · 안정성 · 사용자 경험</a:t>
             </a:r>
@@ -4574,8 +4714,9 @@
                 <a:solidFill>
                   <a:srgbClr val="CBD5E1"/>
                 </a:solidFill>
-                <a:latin typeface="맑은 고딕"/>
-                <a:ea typeface="맑은 고딕"/>
+                <a:latin typeface="Arial"/>
+                <a:ea typeface="맑은 고딕"/>
+                <a:cs typeface="Arial"/>
               </a:rPr>
               <a:t>기술적 마무리 디테일</a:t>
             </a:r>
@@ -4610,8 +4751,9 @@
                 <a:solidFill>
                   <a:srgbClr val="CBD5E1"/>
                 </a:solidFill>
-                <a:latin typeface="맑은 고딕"/>
-                <a:ea typeface="맑은 고딕"/>
+                <a:latin typeface="Arial"/>
+                <a:ea typeface="맑은 고딕"/>
+                <a:cs typeface="Arial"/>
               </a:rPr>
               <a:t>11 / 13</a:t>
             </a:r>
@@ -4691,8 +4833,9 @@
                 <a:solidFill>
                   <a:srgbClr val="1D4ED8"/>
                 </a:solidFill>
-                <a:latin typeface="맑은 고딕"/>
-                <a:ea typeface="맑은 고딕"/>
+                <a:latin typeface="Arial"/>
+                <a:ea typeface="맑은 고딕"/>
+                <a:cs typeface="Arial"/>
               </a:rPr>
               <a:t>🔒 bcrypt</a:t>
             </a:r>
@@ -4727,8 +4870,9 @@
                 <a:solidFill>
                   <a:srgbClr val="0F172A"/>
                 </a:solidFill>
-                <a:latin typeface="맑은 고딕"/>
-                <a:ea typeface="맑은 고딕"/>
+                <a:latin typeface="Arial"/>
+                <a:ea typeface="맑은 고딕"/>
+                <a:cs typeface="Arial"/>
               </a:rPr>
               <a:t>salt round 10 → 평문 비밀번호 영속 저장 없음</a:t>
             </a:r>
@@ -4808,8 +4952,9 @@
                 <a:solidFill>
                   <a:srgbClr val="1D4ED8"/>
                 </a:solidFill>
-                <a:latin typeface="맑은 고딕"/>
-                <a:ea typeface="맑은 고딕"/>
+                <a:latin typeface="Arial"/>
+                <a:ea typeface="맑은 고딕"/>
+                <a:cs typeface="Arial"/>
               </a:rPr>
               <a:t>🪪 JWT</a:t>
             </a:r>
@@ -4844,8 +4989,9 @@
                 <a:solidFill>
                   <a:srgbClr val="0F172A"/>
                 </a:solidFill>
-                <a:latin typeface="맑은 고딕"/>
-                <a:ea typeface="맑은 고딕"/>
+                <a:latin typeface="Arial"/>
+                <a:ea typeface="맑은 고딕"/>
+                <a:cs typeface="Arial"/>
               </a:rPr>
               <a:t>HS256 · Bearer · 7일 만료 · localStorage + axios 인터셉터 자동 첨부</a:t>
             </a:r>
@@ -4925,8 +5071,9 @@
                 <a:solidFill>
                   <a:srgbClr val="1D4ED8"/>
                 </a:solidFill>
-                <a:latin typeface="맑은 고딕"/>
-                <a:ea typeface="맑은 고딕"/>
+                <a:latin typeface="Arial"/>
+                <a:ea typeface="맑은 고딕"/>
+                <a:cs typeface="Arial"/>
               </a:rPr>
               <a:t>🛡 zod</a:t>
             </a:r>
@@ -4961,8 +5108,9 @@
                 <a:solidFill>
                   <a:srgbClr val="0F172A"/>
                 </a:solidFill>
-                <a:latin typeface="맑은 고딕"/>
-                <a:ea typeface="맑은 고딕"/>
+                <a:latin typeface="Arial"/>
+                <a:ea typeface="맑은 고딕"/>
+                <a:cs typeface="Arial"/>
               </a:rPr>
               <a:t>모든 입력 서버단 유효성 검증 (회원가입/CRUD 페이로드)</a:t>
             </a:r>
@@ -5042,8 +5190,9 @@
                 <a:solidFill>
                   <a:srgbClr val="1D4ED8"/>
                 </a:solidFill>
-                <a:latin typeface="맑은 고딕"/>
-                <a:ea typeface="맑은 고딕"/>
+                <a:latin typeface="Arial"/>
+                <a:ea typeface="맑은 고딕"/>
+                <a:cs typeface="Arial"/>
               </a:rPr>
               <a:t>🚷 401 핸들링</a:t>
             </a:r>
@@ -5078,8 +5227,9 @@
                 <a:solidFill>
                   <a:srgbClr val="0F172A"/>
                 </a:solidFill>
-                <a:latin typeface="맑은 고딕"/>
-                <a:ea typeface="맑은 고딕"/>
+                <a:latin typeface="Arial"/>
+                <a:ea typeface="맑은 고딕"/>
+                <a:cs typeface="Arial"/>
               </a:rPr>
               <a:t>axios 응답 인터셉터 → localStorage 제거 + 로그인 화면 이동</a:t>
             </a:r>
@@ -5159,8 +5309,9 @@
                 <a:solidFill>
                   <a:srgbClr val="1D4ED8"/>
                 </a:solidFill>
-                <a:latin typeface="맑은 고딕"/>
-                <a:ea typeface="맑은 고딕"/>
+                <a:latin typeface="Arial"/>
+                <a:ea typeface="맑은 고딕"/>
+                <a:cs typeface="Arial"/>
               </a:rPr>
               <a:t>🌐 CORS</a:t>
             </a:r>
@@ -5195,8 +5346,9 @@
                 <a:solidFill>
                   <a:srgbClr val="0F172A"/>
                 </a:solidFill>
-                <a:latin typeface="맑은 고딕"/>
-                <a:ea typeface="맑은 고딕"/>
+                <a:latin typeface="Arial"/>
+                <a:ea typeface="맑은 고딕"/>
+                <a:cs typeface="Arial"/>
               </a:rPr>
               <a:t>Render env CORS_ORIGIN 화이트리스트 → Vercel 도메인만 허용</a:t>
             </a:r>
@@ -5276,8 +5428,9 @@
                 <a:solidFill>
                   <a:srgbClr val="1D4ED8"/>
                 </a:solidFill>
-                <a:latin typeface="맑은 고딕"/>
-                <a:ea typeface="맑은 고딕"/>
+                <a:latin typeface="Arial"/>
+                <a:ea typeface="맑은 고딕"/>
+                <a:cs typeface="Arial"/>
               </a:rPr>
               <a:t>📴 오프라인</a:t>
             </a:r>
@@ -5312,8 +5465,9 @@
                 <a:solidFill>
                   <a:srgbClr val="0F172A"/>
                 </a:solidFill>
-                <a:latin typeface="맑은 고딕"/>
-                <a:ea typeface="맑은 고딕"/>
+                <a:latin typeface="Arial"/>
+                <a:ea typeface="맑은 고딕"/>
+                <a:cs typeface="Arial"/>
               </a:rPr>
               <a:t>IndexedDB 캐시 → 네트워크 실패 시 마지막 데이터 유지</a:t>
             </a:r>
@@ -5393,8 +5547,9 @@
                 <a:solidFill>
                   <a:srgbClr val="1D4ED8"/>
                 </a:solidFill>
-                <a:latin typeface="맑은 고딕"/>
-                <a:ea typeface="맑은 고딕"/>
+                <a:latin typeface="Arial"/>
+                <a:ea typeface="맑은 고딕"/>
+                <a:cs typeface="Arial"/>
               </a:rPr>
               <a:t>🌓 다크 모드</a:t>
             </a:r>
@@ -5429,8 +5584,9 @@
                 <a:solidFill>
                   <a:srgbClr val="0F172A"/>
                 </a:solidFill>
-                <a:latin typeface="맑은 고딕"/>
-                <a:ea typeface="맑은 고딕"/>
+                <a:latin typeface="Arial"/>
+                <a:ea typeface="맑은 고딕"/>
+                <a:cs typeface="Arial"/>
               </a:rPr>
               <a:t>OS prefers-color-scheme 감지 + 사용자 선택 영구 저장</a:t>
             </a:r>
@@ -5510,8 +5666,9 @@
                 <a:solidFill>
                   <a:srgbClr val="1D4ED8"/>
                 </a:solidFill>
-                <a:latin typeface="맑은 고딕"/>
-                <a:ea typeface="맑은 고딕"/>
+                <a:latin typeface="Arial"/>
+                <a:ea typeface="맑은 고딕"/>
+                <a:cs typeface="Arial"/>
               </a:rPr>
               <a:t>🔔 마감 알림</a:t>
             </a:r>
@@ -5546,8 +5703,9 @@
                 <a:solidFill>
                   <a:srgbClr val="0F172A"/>
                 </a:solidFill>
-                <a:latin typeface="맑은 고딕"/>
-                <a:ea typeface="맑은 고딕"/>
+                <a:latin typeface="Arial"/>
+                <a:ea typeface="맑은 고딕"/>
+                <a:cs typeface="Arial"/>
               </a:rPr>
               <a:t>1분 주기 폴링 · 1시간 이내 마감 · 중복 알림 방지</a:t>
             </a:r>
@@ -5582,8 +5740,9 @@
                 <a:solidFill>
                   <a:srgbClr val="475569"/>
                 </a:solidFill>
-                <a:latin typeface="맑은 고딕"/>
-                <a:ea typeface="맑은 고딕"/>
+                <a:latin typeface="Arial"/>
+                <a:ea typeface="맑은 고딕"/>
+                <a:cs typeface="Arial"/>
               </a:rPr>
               <a:t>PlanIt — 2026-1 Web Programming Final Project · 202100580 이정</a:t>
             </a:r>
@@ -5618,8 +5777,9 @@
                 <a:solidFill>
                   <a:srgbClr val="475569"/>
                 </a:solidFill>
-                <a:latin typeface="맑은 고딕"/>
-                <a:ea typeface="맑은 고딕"/>
+                <a:latin typeface="Arial"/>
+                <a:ea typeface="맑은 고딕"/>
+                <a:cs typeface="Arial"/>
               </a:rPr>
               <a:t>11 / 13</a:t>
             </a:r>
@@ -5715,8 +5875,9 @@
                 <a:solidFill>
                   <a:srgbClr val="FFFFFF"/>
                 </a:solidFill>
-                <a:latin typeface="맑은 고딕"/>
-                <a:ea typeface="맑은 고딕"/>
+                <a:latin typeface="Arial"/>
+                <a:ea typeface="맑은 고딕"/>
+                <a:cs typeface="Arial"/>
               </a:rPr>
               <a:t>라이브 시연</a:t>
             </a:r>
@@ -5751,8 +5912,9 @@
                 <a:solidFill>
                   <a:srgbClr val="CBD5E1"/>
                 </a:solidFill>
-                <a:latin typeface="맑은 고딕"/>
-                <a:ea typeface="맑은 고딕"/>
+                <a:latin typeface="Arial"/>
+                <a:ea typeface="맑은 고딕"/>
+                <a:cs typeface="Arial"/>
               </a:rPr>
               <a:t>이 슬라이드에서 실제 사이트로 전환</a:t>
             </a:r>
@@ -5787,8 +5949,9 @@
                 <a:solidFill>
                   <a:srgbClr val="CBD5E1"/>
                 </a:solidFill>
-                <a:latin typeface="맑은 고딕"/>
-                <a:ea typeface="맑은 고딕"/>
+                <a:latin typeface="Arial"/>
+                <a:ea typeface="맑은 고딕"/>
+                <a:cs typeface="Arial"/>
               </a:rPr>
               <a:t>12 / 13</a:t>
             </a:r>
@@ -5866,8 +6029,9 @@
                 <a:solidFill>
                   <a:srgbClr val="F59E0B"/>
                 </a:solidFill>
-                <a:latin typeface="맑은 고딕"/>
-                <a:ea typeface="맑은 고딕"/>
+                <a:latin typeface="Arial"/>
+                <a:ea typeface="맑은 고딕"/>
+                <a:cs typeface="Arial"/>
               </a:rPr>
               <a:t>시연 URL</a:t>
             </a:r>
@@ -5902,8 +6066,9 @@
                 <a:solidFill>
                   <a:srgbClr val="FFFFFF"/>
                 </a:solidFill>
-                <a:latin typeface="맑은 고딕"/>
-                <a:ea typeface="맑은 고딕"/>
+                <a:latin typeface="Arial"/>
+                <a:ea typeface="맑은 고딕"/>
+                <a:cs typeface="Arial"/>
               </a:rPr>
               <a:t>https://client-eight-ivory-60.vercel.app</a:t>
             </a:r>
@@ -5938,8 +6103,9 @@
                 <a:solidFill>
                   <a:srgbClr val="F59E0B"/>
                 </a:solidFill>
-                <a:latin typeface="맑은 고딕"/>
-                <a:ea typeface="맑은 고딕"/>
+                <a:latin typeface="Arial"/>
+                <a:ea typeface="맑은 고딕"/>
+                <a:cs typeface="Arial"/>
               </a:rPr>
               <a:t>GitHub</a:t>
             </a:r>
@@ -5974,8 +6140,9 @@
                 <a:solidFill>
                   <a:srgbClr val="FFFFFF"/>
                 </a:solidFill>
-                <a:latin typeface="맑은 고딕"/>
-                <a:ea typeface="맑은 고딕"/>
+                <a:latin typeface="Arial"/>
+                <a:ea typeface="맑은 고딕"/>
+                <a:cs typeface="Arial"/>
               </a:rPr>
               <a:t>github.com/Pionia5375/2026-1-web-programming</a:t>
             </a:r>
@@ -6010,8 +6177,9 @@
                 <a:solidFill>
                   <a:srgbClr val="F59E0B"/>
                 </a:solidFill>
-                <a:latin typeface="맑은 고딕"/>
-                <a:ea typeface="맑은 고딕"/>
+                <a:latin typeface="Arial"/>
+                <a:ea typeface="맑은 고딕"/>
+                <a:cs typeface="Arial"/>
               </a:rPr>
               <a:t>API</a:t>
             </a:r>
@@ -6046,8 +6214,9 @@
                 <a:solidFill>
                   <a:srgbClr val="FFFFFF"/>
                 </a:solidFill>
-                <a:latin typeface="맑은 고딕"/>
-                <a:ea typeface="맑은 고딕"/>
+                <a:latin typeface="Arial"/>
+                <a:ea typeface="맑은 고딕"/>
+                <a:cs typeface="Arial"/>
               </a:rPr>
               <a:t>planit-api-i1th.onrender.com</a:t>
             </a:r>
@@ -6082,8 +6251,9 @@
                 <a:solidFill>
                   <a:srgbClr val="CBD5E1"/>
                 </a:solidFill>
-                <a:latin typeface="맑은 고딕"/>
-                <a:ea typeface="맑은 고딕"/>
+                <a:latin typeface="Arial"/>
+                <a:ea typeface="맑은 고딕"/>
+                <a:cs typeface="Arial"/>
               </a:rPr>
               <a:t>(Render Free — 첫 호출 cold start 30~50초)</a:t>
             </a:r>
@@ -6163,8 +6333,9 @@
                 <a:solidFill>
                   <a:srgbClr val="1D4ED8"/>
                 </a:solidFill>
-                <a:latin typeface="맑은 고딕"/>
-                <a:ea typeface="맑은 고딕"/>
+                <a:latin typeface="Arial"/>
+                <a:ea typeface="맑은 고딕"/>
+                <a:cs typeface="Arial"/>
               </a:rPr>
               <a:t>🎬 시연 순서 (2분 15초)</a:t>
             </a:r>
@@ -6203,8 +6374,9 @@
                 <a:solidFill>
                   <a:srgbClr val="1D4ED8"/>
                 </a:solidFill>
-                <a:latin typeface="맑은 고딕"/>
-                <a:ea typeface="맑은 고딕"/>
+                <a:latin typeface="Arial"/>
+                <a:ea typeface="맑은 고딕"/>
+                <a:cs typeface="Arial"/>
               </a:rPr>
               <a:t>로그인  </a:t>
             </a:r>
@@ -6213,8 +6385,9 @@
                 <a:solidFill>
                   <a:srgbClr val="0F172A"/>
                 </a:solidFill>
-                <a:latin typeface="맑은 고딕"/>
-                <a:ea typeface="맑은 고딕"/>
+                <a:latin typeface="Arial"/>
+                <a:ea typeface="맑은 고딕"/>
+                <a:cs typeface="Arial"/>
               </a:rPr>
               <a:t>JWT 발급 → 대시보드 진입</a:t>
             </a:r>
@@ -6230,8 +6403,9 @@
                 <a:solidFill>
                   <a:srgbClr val="1D4ED8"/>
                 </a:solidFill>
-                <a:latin typeface="맑은 고딕"/>
-                <a:ea typeface="맑은 고딕"/>
+                <a:latin typeface="Arial"/>
+                <a:ea typeface="맑은 고딕"/>
+                <a:cs typeface="Arial"/>
               </a:rPr>
               <a:t>할 일  </a:t>
             </a:r>
@@ -6240,8 +6414,9 @@
                 <a:solidFill>
                   <a:srgbClr val="0F172A"/>
                 </a:solidFill>
-                <a:latin typeface="맑은 고딕"/>
-                <a:ea typeface="맑은 고딕"/>
+                <a:latin typeface="Arial"/>
+                <a:ea typeface="맑은 고딕"/>
+                <a:cs typeface="Arial"/>
               </a:rPr>
               <a:t>추가 → 우선순위 색 뱃지 → 검색</a:t>
             </a:r>
@@ -6257,8 +6432,9 @@
                 <a:solidFill>
                   <a:srgbClr val="1D4ED8"/>
                 </a:solidFill>
-                <a:latin typeface="맑은 고딕"/>
-                <a:ea typeface="맑은 고딕"/>
+                <a:latin typeface="Arial"/>
+                <a:ea typeface="맑은 고딕"/>
+                <a:cs typeface="Arial"/>
               </a:rPr>
               <a:t>일정  </a:t>
             </a:r>
@@ -6267,8 +6443,9 @@
                 <a:solidFill>
                   <a:srgbClr val="0F172A"/>
                 </a:solidFill>
-                <a:latin typeface="맑은 고딕"/>
-                <a:ea typeface="맑은 고딕"/>
+                <a:latin typeface="Arial"/>
+                <a:ea typeface="맑은 고딕"/>
+                <a:cs typeface="Arial"/>
               </a:rPr>
               <a:t>장소/시간 입력 → zod 유효성</a:t>
             </a:r>
@@ -6284,8 +6461,9 @@
                 <a:solidFill>
                   <a:srgbClr val="1D4ED8"/>
                 </a:solidFill>
-                <a:latin typeface="맑은 고딕"/>
-                <a:ea typeface="맑은 고딕"/>
+                <a:latin typeface="Arial"/>
+                <a:ea typeface="맑은 고딕"/>
+                <a:cs typeface="Arial"/>
               </a:rPr>
               <a:t>캘린더  </a:t>
             </a:r>
@@ -6294,8 +6472,9 @@
                 <a:solidFill>
                   <a:srgbClr val="0F172A"/>
                 </a:solidFill>
-                <a:latin typeface="맑은 고딕"/>
-                <a:ea typeface="맑은 고딕"/>
+                <a:latin typeface="Arial"/>
+                <a:ea typeface="맑은 고딕"/>
+                <a:cs typeface="Arial"/>
               </a:rPr>
               <a:t>월/주/일/아젠다 + 한국어</a:t>
             </a:r>
@@ -6311,8 +6490,9 @@
                 <a:solidFill>
                   <a:srgbClr val="1D4ED8"/>
                 </a:solidFill>
-                <a:latin typeface="맑은 고딕"/>
-                <a:ea typeface="맑은 고딕"/>
+                <a:latin typeface="Arial"/>
+                <a:ea typeface="맑은 고딕"/>
+                <a:cs typeface="Arial"/>
               </a:rPr>
               <a:t>다크 모드  </a:t>
             </a:r>
@@ -6321,8 +6501,9 @@
                 <a:solidFill>
                   <a:srgbClr val="0F172A"/>
                 </a:solidFill>
-                <a:latin typeface="맑은 고딕"/>
-                <a:ea typeface="맑은 고딕"/>
+                <a:latin typeface="Arial"/>
+                <a:ea typeface="맑은 고딕"/>
+                <a:cs typeface="Arial"/>
               </a:rPr>
               <a:t>토글 → 새로고침해도 유지</a:t>
             </a:r>
@@ -6338,8 +6519,9 @@
                 <a:solidFill>
                   <a:srgbClr val="1D4ED8"/>
                 </a:solidFill>
-                <a:latin typeface="맑은 고딕"/>
-                <a:ea typeface="맑은 고딕"/>
+                <a:latin typeface="Arial"/>
+                <a:ea typeface="맑은 고딕"/>
+                <a:cs typeface="Arial"/>
               </a:rPr>
               <a:t>마감 알림  </a:t>
             </a:r>
@@ -6348,8 +6530,9 @@
                 <a:solidFill>
                   <a:srgbClr val="0F172A"/>
                 </a:solidFill>
-                <a:latin typeface="맑은 고딕"/>
-                <a:ea typeface="맑은 고딕"/>
+                <a:latin typeface="Arial"/>
+                <a:ea typeface="맑은 고딕"/>
+                <a:cs typeface="Arial"/>
               </a:rPr>
               <a:t>미리 등록한 할 일 → Notification</a:t>
             </a:r>
@@ -6365,8 +6548,9 @@
                 <a:solidFill>
                   <a:srgbClr val="1D4ED8"/>
                 </a:solidFill>
-                <a:latin typeface="맑은 고딕"/>
-                <a:ea typeface="맑은 고딕"/>
+                <a:latin typeface="Arial"/>
+                <a:ea typeface="맑은 고딕"/>
+                <a:cs typeface="Arial"/>
               </a:rPr>
               <a:t>IndexedDB  </a:t>
             </a:r>
@@ -6375,8 +6559,9 @@
                 <a:solidFill>
                   <a:srgbClr val="0F172A"/>
                 </a:solidFill>
-                <a:latin typeface="맑은 고딕"/>
-                <a:ea typeface="맑은 고딕"/>
+                <a:latin typeface="Arial"/>
+                <a:ea typeface="맑은 고딕"/>
+                <a:cs typeface="Arial"/>
               </a:rPr>
               <a:t>DevTools 로 planit-cache 확인</a:t>
             </a:r>
@@ -6411,8 +6596,9 @@
                 <a:solidFill>
                   <a:srgbClr val="475569"/>
                 </a:solidFill>
-                <a:latin typeface="맑은 고딕"/>
-                <a:ea typeface="맑은 고딕"/>
+                <a:latin typeface="Arial"/>
+                <a:ea typeface="맑은 고딕"/>
+                <a:cs typeface="Arial"/>
               </a:rPr>
               <a:t>PlanIt — 2026-1 Web Programming Final Project · 202100580 이정</a:t>
             </a:r>
@@ -6447,8 +6633,9 @@
                 <a:solidFill>
                   <a:srgbClr val="475569"/>
                 </a:solidFill>
-                <a:latin typeface="맑은 고딕"/>
-                <a:ea typeface="맑은 고딕"/>
+                <a:latin typeface="Arial"/>
+                <a:ea typeface="맑은 고딕"/>
+                <a:cs typeface="Arial"/>
               </a:rPr>
               <a:t>12 / 13</a:t>
             </a:r>
@@ -6544,8 +6731,9 @@
                 <a:solidFill>
                   <a:srgbClr val="FFFFFF"/>
                 </a:solidFill>
-                <a:latin typeface="맑은 고딕"/>
-                <a:ea typeface="맑은 고딕"/>
+                <a:latin typeface="Arial"/>
+                <a:ea typeface="맑은 고딕"/>
+                <a:cs typeface="Arial"/>
               </a:rPr>
               <a:t>감사합니다.</a:t>
             </a:r>
@@ -6580,8 +6768,9 @@
                 <a:solidFill>
                   <a:srgbClr val="F59E0B"/>
                 </a:solidFill>
-                <a:latin typeface="맑은 고딕"/>
-                <a:ea typeface="맑은 고딕"/>
+                <a:latin typeface="Arial"/>
+                <a:ea typeface="맑은 고딕"/>
+                <a:cs typeface="Arial"/>
               </a:rPr>
               <a:t>PlanIt — 14주차 설계서를 그대로 구현한 풀스택 웹 서비스</a:t>
             </a:r>
@@ -6661,8 +6850,9 @@
                 <a:solidFill>
                   <a:srgbClr val="F59E0B"/>
                 </a:solidFill>
-                <a:latin typeface="맑은 고딕"/>
-                <a:ea typeface="맑은 고딕"/>
+                <a:latin typeface="Arial"/>
+                <a:ea typeface="맑은 고딕"/>
+                <a:cs typeface="Arial"/>
               </a:rPr>
               <a:t>🌐 서비스</a:t>
             </a:r>
@@ -6697,8 +6887,9 @@
                 <a:solidFill>
                   <a:srgbClr val="FFFFFF"/>
                 </a:solidFill>
-                <a:latin typeface="맑은 고딕"/>
-                <a:ea typeface="맑은 고딕"/>
+                <a:latin typeface="Arial"/>
+                <a:ea typeface="맑은 고딕"/>
+                <a:cs typeface="Arial"/>
               </a:rPr>
               <a:t>https://client-eight-ivory-60.vercel.app</a:t>
             </a:r>
@@ -6778,8 +6969,9 @@
                 <a:solidFill>
                   <a:srgbClr val="F59E0B"/>
                 </a:solidFill>
-                <a:latin typeface="맑은 고딕"/>
-                <a:ea typeface="맑은 고딕"/>
+                <a:latin typeface="Arial"/>
+                <a:ea typeface="맑은 고딕"/>
+                <a:cs typeface="Arial"/>
               </a:rPr>
               <a:t>📦 GitHub</a:t>
             </a:r>
@@ -6814,8 +7006,9 @@
                 <a:solidFill>
                   <a:srgbClr val="FFFFFF"/>
                 </a:solidFill>
-                <a:latin typeface="맑은 고딕"/>
-                <a:ea typeface="맑은 고딕"/>
+                <a:latin typeface="Arial"/>
+                <a:ea typeface="맑은 고딕"/>
+                <a:cs typeface="Arial"/>
               </a:rPr>
               <a:t>github.com/Pionia5375/2026-1-web-programming</a:t>
             </a:r>
@@ -6850,8 +7043,9 @@
                 <a:solidFill>
                   <a:srgbClr val="CBD5E1"/>
                 </a:solidFill>
-                <a:latin typeface="맑은 고딕"/>
-                <a:ea typeface="맑은 고딕"/>
+                <a:latin typeface="Arial"/>
+                <a:ea typeface="맑은 고딕"/>
+                <a:cs typeface="Arial"/>
               </a:rPr>
               <a:t>컴퓨터공학부 · 202100580 · 이정 · 2026-1 Web Programming</a:t>
             </a:r>
@@ -6947,8 +7141,9 @@
                 <a:solidFill>
                   <a:srgbClr val="FFFFFF"/>
                 </a:solidFill>
-                <a:latin typeface="맑은 고딕"/>
-                <a:ea typeface="맑은 고딕"/>
+                <a:latin typeface="Arial"/>
+                <a:ea typeface="맑은 고딕"/>
+                <a:cs typeface="Arial"/>
               </a:rPr>
               <a:t>왜 만들었는가</a:t>
             </a:r>
@@ -6983,8 +7178,9 @@
                 <a:solidFill>
                   <a:srgbClr val="CBD5E1"/>
                 </a:solidFill>
-                <a:latin typeface="맑은 고딕"/>
-                <a:ea typeface="맑은 고딕"/>
+                <a:latin typeface="Arial"/>
+                <a:ea typeface="맑은 고딕"/>
+                <a:cs typeface="Arial"/>
               </a:rPr>
               <a:t>대학생의 두 가지 일정 패턴</a:t>
             </a:r>
@@ -7019,8 +7215,9 @@
                 <a:solidFill>
                   <a:srgbClr val="CBD5E1"/>
                 </a:solidFill>
-                <a:latin typeface="맑은 고딕"/>
-                <a:ea typeface="맑은 고딕"/>
+                <a:latin typeface="Arial"/>
+                <a:ea typeface="맑은 고딕"/>
+                <a:cs typeface="Arial"/>
               </a:rPr>
               <a:t>2 / 13</a:t>
             </a:r>
@@ -7100,8 +7297,9 @@
                 <a:solidFill>
                   <a:srgbClr val="E11D48"/>
                 </a:solidFill>
-                <a:latin typeface="맑은 고딕"/>
-                <a:ea typeface="맑은 고딕"/>
+                <a:latin typeface="Arial"/>
+                <a:ea typeface="맑은 고딕"/>
+                <a:cs typeface="Arial"/>
               </a:rPr>
               <a:t>❗ 문제</a:t>
             </a:r>
@@ -7136,8 +7334,9 @@
                 <a:solidFill>
                   <a:srgbClr val="0F172A"/>
                 </a:solidFill>
-                <a:latin typeface="맑은 고딕"/>
-                <a:ea typeface="맑은 고딕"/>
+                <a:latin typeface="Arial"/>
+                <a:ea typeface="맑은 고딕"/>
+                <a:cs typeface="Arial"/>
               </a:rPr>
               <a:t>대학생은 매일 두 종류의 일정을 다룬다</a:t>
             </a:r>
@@ -7176,8 +7375,9 @@
                 <a:solidFill>
                   <a:srgbClr val="1D4ED8"/>
                 </a:solidFill>
-                <a:latin typeface="맑은 고딕"/>
-                <a:ea typeface="맑은 고딕"/>
+                <a:latin typeface="Arial"/>
+                <a:ea typeface="맑은 고딕"/>
+                <a:cs typeface="Arial"/>
               </a:rPr>
               <a:t>Event  </a:t>
             </a:r>
@@ -7186,8 +7386,9 @@
                 <a:solidFill>
                   <a:srgbClr val="0F172A"/>
                 </a:solidFill>
-                <a:latin typeface="맑은 고딕"/>
-                <a:ea typeface="맑은 고딕"/>
+                <a:latin typeface="Arial"/>
+                <a:ea typeface="맑은 고딕"/>
+                <a:cs typeface="Arial"/>
               </a:rPr>
               <a:t>강의 · 미팅 · 시험 → 시각이 고정된 일정</a:t>
             </a:r>
@@ -7203,8 +7404,9 @@
                 <a:solidFill>
                   <a:srgbClr val="1D4ED8"/>
                 </a:solidFill>
-                <a:latin typeface="맑은 고딕"/>
-                <a:ea typeface="맑은 고딕"/>
+                <a:latin typeface="Arial"/>
+                <a:ea typeface="맑은 고딕"/>
+                <a:cs typeface="Arial"/>
               </a:rPr>
               <a:t>Task  </a:t>
             </a:r>
@@ -7213,8 +7415,9 @@
                 <a:solidFill>
                   <a:srgbClr val="0F172A"/>
                 </a:solidFill>
-                <a:latin typeface="맑은 고딕"/>
-                <a:ea typeface="맑은 고딕"/>
+                <a:latin typeface="Arial"/>
+                <a:ea typeface="맑은 고딕"/>
+                <a:cs typeface="Arial"/>
               </a:rPr>
               <a:t>과제 · 보고서 · 학습 → 마감일이 있는 작업</a:t>
             </a:r>
@@ -7230,8 +7433,9 @@
                 <a:solidFill>
                   <a:srgbClr val="1D4ED8"/>
                 </a:solidFill>
-                <a:latin typeface="맑은 고딕"/>
-                <a:ea typeface="맑은 고딕"/>
+                <a:latin typeface="Arial"/>
+                <a:ea typeface="맑은 고딕"/>
+                <a:cs typeface="Arial"/>
               </a:rPr>
               <a:t>현실  </a:t>
             </a:r>
@@ -7240,8 +7444,9 @@
                 <a:solidFill>
                   <a:srgbClr val="0F172A"/>
                 </a:solidFill>
-                <a:latin typeface="맑은 고딕"/>
-                <a:ea typeface="맑은 고딕"/>
+                <a:latin typeface="Arial"/>
+                <a:ea typeface="맑은 고딕"/>
+                <a:cs typeface="Arial"/>
               </a:rPr>
               <a:t>캘린더 앱과 투두 앱이 분리 → 두 앱을 오가야 함</a:t>
             </a:r>
@@ -7257,8 +7462,9 @@
                 <a:solidFill>
                   <a:srgbClr val="1D4ED8"/>
                 </a:solidFill>
-                <a:latin typeface="맑은 고딕"/>
-                <a:ea typeface="맑은 고딕"/>
+                <a:latin typeface="Arial"/>
+                <a:ea typeface="맑은 고딕"/>
+                <a:cs typeface="Arial"/>
               </a:rPr>
               <a:t>결과  </a:t>
             </a:r>
@@ -7267,8 +7473,9 @@
                 <a:solidFill>
                   <a:srgbClr val="0F172A"/>
                 </a:solidFill>
-                <a:latin typeface="맑은 고딕"/>
-                <a:ea typeface="맑은 고딕"/>
+                <a:latin typeface="Arial"/>
+                <a:ea typeface="맑은 고딕"/>
+                <a:cs typeface="Arial"/>
               </a:rPr>
               <a:t>맥락 전환 비용, 누락 위험</a:t>
             </a:r>
@@ -7348,8 +7555,9 @@
                 <a:solidFill>
                   <a:srgbClr val="10B981"/>
                 </a:solidFill>
-                <a:latin typeface="맑은 고딕"/>
-                <a:ea typeface="맑은 고딕"/>
+                <a:latin typeface="Arial"/>
+                <a:ea typeface="맑은 고딕"/>
+                <a:cs typeface="Arial"/>
               </a:rPr>
               <a:t>✔ 해결</a:t>
             </a:r>
@@ -7384,8 +7592,9 @@
                 <a:solidFill>
                   <a:srgbClr val="0F172A"/>
                 </a:solidFill>
-                <a:latin typeface="맑은 고딕"/>
-                <a:ea typeface="맑은 고딕"/>
+                <a:latin typeface="Arial"/>
+                <a:ea typeface="맑은 고딕"/>
+                <a:cs typeface="Arial"/>
               </a:rPr>
               <a:t>둘을 한 화면에 모은다</a:t>
             </a:r>
@@ -7424,8 +7633,9 @@
                 <a:solidFill>
                   <a:srgbClr val="0F172A"/>
                 </a:solidFill>
-                <a:latin typeface="맑은 고딕"/>
-                <a:ea typeface="맑은 고딕"/>
+                <a:latin typeface="Arial"/>
+                <a:ea typeface="맑은 고딕"/>
+                <a:cs typeface="Arial"/>
               </a:rPr>
               <a:t>•  Task 와 Event 를 동일한 데이터 모델로 추상화</a:t>
             </a:r>
@@ -7441,8 +7651,9 @@
                 <a:solidFill>
                   <a:srgbClr val="0F172A"/>
                 </a:solidFill>
-                <a:latin typeface="맑은 고딕"/>
-                <a:ea typeface="맑은 고딕"/>
+                <a:latin typeface="Arial"/>
+                <a:ea typeface="맑은 고딕"/>
+                <a:cs typeface="Arial"/>
               </a:rPr>
               <a:t>•  대시보드 = 오늘 마감 할 일 + 오늘 일정</a:t>
             </a:r>
@@ -7458,8 +7669,9 @@
                 <a:solidFill>
                   <a:srgbClr val="0F172A"/>
                 </a:solidFill>
-                <a:latin typeface="맑은 고딕"/>
-                <a:ea typeface="맑은 고딕"/>
+                <a:latin typeface="Arial"/>
+                <a:ea typeface="맑은 고딕"/>
+                <a:cs typeface="Arial"/>
               </a:rPr>
               <a:t>•  통합 캘린더 = 월/주/일/아젠다 한 화면</a:t>
             </a:r>
@@ -7475,8 +7687,9 @@
                 <a:solidFill>
                   <a:srgbClr val="0F172A"/>
                 </a:solidFill>
-                <a:latin typeface="맑은 고딕"/>
-                <a:ea typeface="맑은 고딕"/>
+                <a:latin typeface="Arial"/>
+                <a:ea typeface="맑은 고딕"/>
+                <a:cs typeface="Arial"/>
               </a:rPr>
               <a:t>•  대학생 → 일반 사용자로 확장 가능한 단순 구조</a:t>
             </a:r>
@@ -7511,8 +7724,9 @@
                 <a:solidFill>
                   <a:srgbClr val="475569"/>
                 </a:solidFill>
-                <a:latin typeface="맑은 고딕"/>
-                <a:ea typeface="맑은 고딕"/>
+                <a:latin typeface="Arial"/>
+                <a:ea typeface="맑은 고딕"/>
+                <a:cs typeface="Arial"/>
               </a:rPr>
               <a:t>PlanIt — 2026-1 Web Programming Final Project · 202100580 이정</a:t>
             </a:r>
@@ -7547,8 +7761,9 @@
                 <a:solidFill>
                   <a:srgbClr val="475569"/>
                 </a:solidFill>
-                <a:latin typeface="맑은 고딕"/>
-                <a:ea typeface="맑은 고딕"/>
+                <a:latin typeface="Arial"/>
+                <a:ea typeface="맑은 고딕"/>
+                <a:cs typeface="Arial"/>
               </a:rPr>
               <a:t>2 / 13</a:t>
             </a:r>
@@ -7644,8 +7859,9 @@
                 <a:solidFill>
                   <a:srgbClr val="FFFFFF"/>
                 </a:solidFill>
-                <a:latin typeface="맑은 고딕"/>
-                <a:ea typeface="맑은 고딕"/>
+                <a:latin typeface="Arial"/>
+                <a:ea typeface="맑은 고딕"/>
+                <a:cs typeface="Arial"/>
               </a:rPr>
               <a:t>서비스 한눈에</a:t>
             </a:r>
@@ -7680,8 +7896,9 @@
                 <a:solidFill>
                   <a:srgbClr val="CBD5E1"/>
                 </a:solidFill>
-                <a:latin typeface="맑은 고딕"/>
-                <a:ea typeface="맑은 고딕"/>
+                <a:latin typeface="Arial"/>
+                <a:ea typeface="맑은 고딕"/>
+                <a:cs typeface="Arial"/>
               </a:rPr>
               <a:t>핵심 기능 6가지</a:t>
             </a:r>
@@ -7716,8 +7933,9 @@
                 <a:solidFill>
                   <a:srgbClr val="CBD5E1"/>
                 </a:solidFill>
-                <a:latin typeface="맑은 고딕"/>
-                <a:ea typeface="맑은 고딕"/>
+                <a:latin typeface="Arial"/>
+                <a:ea typeface="맑은 고딕"/>
+                <a:cs typeface="Arial"/>
               </a:rPr>
               <a:t>3 / 13</a:t>
             </a:r>
@@ -7797,8 +8015,9 @@
                 <a:solidFill>
                   <a:srgbClr val="1D4ED8"/>
                 </a:solidFill>
-                <a:latin typeface="맑은 고딕"/>
-                <a:ea typeface="맑은 고딕"/>
+                <a:latin typeface="Arial"/>
+                <a:ea typeface="맑은 고딕"/>
+                <a:cs typeface="Arial"/>
               </a:rPr>
               <a:t>🔐</a:t>
             </a:r>
@@ -7833,8 +8052,9 @@
                 <a:solidFill>
                   <a:srgbClr val="0F172A"/>
                 </a:solidFill>
-                <a:latin typeface="맑은 고딕"/>
-                <a:ea typeface="맑은 고딕"/>
+                <a:latin typeface="Arial"/>
+                <a:ea typeface="맑은 고딕"/>
+                <a:cs typeface="Arial"/>
               </a:rPr>
               <a:t>인증</a:t>
             </a:r>
@@ -7869,8 +8089,9 @@
                 <a:solidFill>
                   <a:srgbClr val="475569"/>
                 </a:solidFill>
-                <a:latin typeface="맑은 고딕"/>
-                <a:ea typeface="맑은 고딕"/>
+                <a:latin typeface="Arial"/>
+                <a:ea typeface="맑은 고딕"/>
+                <a:cs typeface="Arial"/>
               </a:rPr>
               <a:t>이메일/비밀번호 + bcrypt + JWT 7일</a:t>
             </a:r>
@@ -7950,8 +8171,9 @@
                 <a:solidFill>
                   <a:srgbClr val="1D4ED8"/>
                 </a:solidFill>
-                <a:latin typeface="맑은 고딕"/>
-                <a:ea typeface="맑은 고딕"/>
+                <a:latin typeface="Arial"/>
+                <a:ea typeface="맑은 고딕"/>
+                <a:cs typeface="Arial"/>
               </a:rPr>
               <a:t>✅</a:t>
             </a:r>
@@ -7986,8 +8208,9 @@
                 <a:solidFill>
                   <a:srgbClr val="0F172A"/>
                 </a:solidFill>
-                <a:latin typeface="맑은 고딕"/>
-                <a:ea typeface="맑은 고딕"/>
+                <a:latin typeface="Arial"/>
+                <a:ea typeface="맑은 고딕"/>
+                <a:cs typeface="Arial"/>
               </a:rPr>
               <a:t>할 일 (Task)</a:t>
             </a:r>
@@ -8022,8 +8245,9 @@
                 <a:solidFill>
                   <a:srgbClr val="475569"/>
                 </a:solidFill>
-                <a:latin typeface="맑은 고딕"/>
-                <a:ea typeface="맑은 고딕"/>
+                <a:latin typeface="Arial"/>
+                <a:ea typeface="맑은 고딕"/>
+                <a:cs typeface="Arial"/>
               </a:rPr>
               <a:t>제목 · 마감일 · 우선순위 · 완료 · 검색/필터</a:t>
             </a:r>
@@ -8103,8 +8327,9 @@
                 <a:solidFill>
                   <a:srgbClr val="1D4ED8"/>
                 </a:solidFill>
-                <a:latin typeface="맑은 고딕"/>
-                <a:ea typeface="맑은 고딕"/>
+                <a:latin typeface="Arial"/>
+                <a:ea typeface="맑은 고딕"/>
+                <a:cs typeface="Arial"/>
               </a:rPr>
               <a:t>📅</a:t>
             </a:r>
@@ -8139,8 +8364,9 @@
                 <a:solidFill>
                   <a:srgbClr val="0F172A"/>
                 </a:solidFill>
-                <a:latin typeface="맑은 고딕"/>
-                <a:ea typeface="맑은 고딕"/>
+                <a:latin typeface="Arial"/>
+                <a:ea typeface="맑은 고딕"/>
+                <a:cs typeface="Arial"/>
               </a:rPr>
               <a:t>일정 (Event)</a:t>
             </a:r>
@@ -8175,8 +8401,9 @@
                 <a:solidFill>
                   <a:srgbClr val="475569"/>
                 </a:solidFill>
-                <a:latin typeface="맑은 고딕"/>
-                <a:ea typeface="맑은 고딕"/>
+                <a:latin typeface="Arial"/>
+                <a:ea typeface="맑은 고딕"/>
+                <a:cs typeface="Arial"/>
               </a:rPr>
               <a:t>제목 · 장소 · 시작/종료</a:t>
             </a:r>
@@ -8256,8 +8483,9 @@
                 <a:solidFill>
                   <a:srgbClr val="1D4ED8"/>
                 </a:solidFill>
-                <a:latin typeface="맑은 고딕"/>
-                <a:ea typeface="맑은 고딕"/>
+                <a:latin typeface="Arial"/>
+                <a:ea typeface="맑은 고딕"/>
+                <a:cs typeface="Arial"/>
               </a:rPr>
               <a:t>🗓️</a:t>
             </a:r>
@@ -8292,8 +8520,9 @@
                 <a:solidFill>
                   <a:srgbClr val="0F172A"/>
                 </a:solidFill>
-                <a:latin typeface="맑은 고딕"/>
-                <a:ea typeface="맑은 고딕"/>
+                <a:latin typeface="Arial"/>
+                <a:ea typeface="맑은 고딕"/>
+                <a:cs typeface="Arial"/>
               </a:rPr>
               <a:t>통합 캘린더</a:t>
             </a:r>
@@ -8328,8 +8557,9 @@
                 <a:solidFill>
                   <a:srgbClr val="475569"/>
                 </a:solidFill>
-                <a:latin typeface="맑은 고딕"/>
-                <a:ea typeface="맑은 고딕"/>
+                <a:latin typeface="Arial"/>
+                <a:ea typeface="맑은 고딕"/>
+                <a:cs typeface="Arial"/>
               </a:rPr>
               <a:t>월/주/일/아젠다 + 한국어 + Task/Event 색 분리</a:t>
             </a:r>
@@ -8409,8 +8639,9 @@
                 <a:solidFill>
                   <a:srgbClr val="1D4ED8"/>
                 </a:solidFill>
-                <a:latin typeface="맑은 고딕"/>
-                <a:ea typeface="맑은 고딕"/>
+                <a:latin typeface="Arial"/>
+                <a:ea typeface="맑은 고딕"/>
+                <a:cs typeface="Arial"/>
               </a:rPr>
               <a:t>🏠</a:t>
             </a:r>
@@ -8445,8 +8676,9 @@
                 <a:solidFill>
                   <a:srgbClr val="0F172A"/>
                 </a:solidFill>
-                <a:latin typeface="맑은 고딕"/>
-                <a:ea typeface="맑은 고딕"/>
+                <a:latin typeface="Arial"/>
+                <a:ea typeface="맑은 고딕"/>
+                <a:cs typeface="Arial"/>
               </a:rPr>
               <a:t>대시보드</a:t>
             </a:r>
@@ -8481,8 +8713,9 @@
                 <a:solidFill>
                   <a:srgbClr val="475569"/>
                 </a:solidFill>
-                <a:latin typeface="맑은 고딕"/>
-                <a:ea typeface="맑은 고딕"/>
+                <a:latin typeface="Arial"/>
+                <a:ea typeface="맑은 고딕"/>
+                <a:cs typeface="Arial"/>
               </a:rPr>
               <a:t>오늘 마감 할 일 + 오늘 일정</a:t>
             </a:r>
@@ -8562,8 +8795,9 @@
                 <a:solidFill>
                   <a:srgbClr val="1D4ED8"/>
                 </a:solidFill>
-                <a:latin typeface="맑은 고딕"/>
-                <a:ea typeface="맑은 고딕"/>
+                <a:latin typeface="Arial"/>
+                <a:ea typeface="맑은 고딕"/>
+                <a:cs typeface="Arial"/>
               </a:rPr>
               <a:t>🔔</a:t>
             </a:r>
@@ -8598,8 +8832,9 @@
                 <a:solidFill>
                   <a:srgbClr val="0F172A"/>
                 </a:solidFill>
-                <a:latin typeface="맑은 고딕"/>
-                <a:ea typeface="맑은 고딕"/>
+                <a:latin typeface="Arial"/>
+                <a:ea typeface="맑은 고딕"/>
+                <a:cs typeface="Arial"/>
               </a:rPr>
               <a:t>마감 알림 · 다크 모드</a:t>
             </a:r>
@@ -8634,8 +8869,9 @@
                 <a:solidFill>
                   <a:srgbClr val="475569"/>
                 </a:solidFill>
-                <a:latin typeface="맑은 고딕"/>
-                <a:ea typeface="맑은 고딕"/>
+                <a:latin typeface="Arial"/>
+                <a:ea typeface="맑은 고딕"/>
+                <a:cs typeface="Arial"/>
               </a:rPr>
               <a:t>Notification API + localStorage 영구</a:t>
             </a:r>
@@ -8670,8 +8906,9 @@
                 <a:solidFill>
                   <a:srgbClr val="475569"/>
                 </a:solidFill>
-                <a:latin typeface="맑은 고딕"/>
-                <a:ea typeface="맑은 고딕"/>
+                <a:latin typeface="Arial"/>
+                <a:ea typeface="맑은 고딕"/>
+                <a:cs typeface="Arial"/>
               </a:rPr>
               <a:t>PlanIt — 2026-1 Web Programming Final Project · 202100580 이정</a:t>
             </a:r>
@@ -8706,8 +8943,9 @@
                 <a:solidFill>
                   <a:srgbClr val="475569"/>
                 </a:solidFill>
-                <a:latin typeface="맑은 고딕"/>
-                <a:ea typeface="맑은 고딕"/>
+                <a:latin typeface="Arial"/>
+                <a:ea typeface="맑은 고딕"/>
+                <a:cs typeface="Arial"/>
               </a:rPr>
               <a:t>3 / 13</a:t>
             </a:r>
@@ -8803,8 +9041,9 @@
                 <a:solidFill>
                   <a:srgbClr val="FFFFFF"/>
                 </a:solidFill>
-                <a:latin typeface="맑은 고딕"/>
-                <a:ea typeface="맑은 고딕"/>
+                <a:latin typeface="Arial"/>
+                <a:ea typeface="맑은 고딕"/>
+                <a:cs typeface="Arial"/>
               </a:rPr>
               <a:t>전체 아키텍처</a:t>
             </a:r>
@@ -8839,8 +9078,9 @@
                 <a:solidFill>
                   <a:srgbClr val="CBD5E1"/>
                 </a:solidFill>
-                <a:latin typeface="맑은 고딕"/>
-                <a:ea typeface="맑은 고딕"/>
+                <a:latin typeface="Arial"/>
+                <a:ea typeface="맑은 고딕"/>
+                <a:cs typeface="Arial"/>
               </a:rPr>
               <a:t>Browser → Vercel → Render(Docker) → Neon Postgres</a:t>
             </a:r>
@@ -8875,8 +9115,9 @@
                 <a:solidFill>
                   <a:srgbClr val="CBD5E1"/>
                 </a:solidFill>
-                <a:latin typeface="맑은 고딕"/>
-                <a:ea typeface="맑은 고딕"/>
+                <a:latin typeface="Arial"/>
+                <a:ea typeface="맑은 고딕"/>
+                <a:cs typeface="Arial"/>
               </a:rPr>
               <a:t>4 / 13</a:t>
             </a:r>
@@ -8956,8 +9197,9 @@
                 <a:solidFill>
                   <a:srgbClr val="F59E0B"/>
                 </a:solidFill>
-                <a:latin typeface="맑은 고딕"/>
-                <a:ea typeface="맑은 고딕"/>
+                <a:latin typeface="Arial"/>
+                <a:ea typeface="맑은 고딕"/>
+                <a:cs typeface="Arial"/>
               </a:rPr>
               <a:t>Browser</a:t>
             </a:r>
@@ -8992,8 +9234,9 @@
                 <a:solidFill>
                   <a:srgbClr val="475569"/>
                 </a:solidFill>
-                <a:latin typeface="맑은 고딕"/>
-                <a:ea typeface="맑은 고딕"/>
+                <a:latin typeface="Arial"/>
+                <a:ea typeface="맑은 고딕"/>
+                <a:cs typeface="Arial"/>
               </a:rPr>
               <a:t>React SPA
 localStorage / sessionStorage / IndexedDB</a:t>
@@ -9074,8 +9317,9 @@
                 <a:solidFill>
                   <a:srgbClr val="1D4ED8"/>
                 </a:solidFill>
-                <a:latin typeface="맑은 고딕"/>
-                <a:ea typeface="맑은 고딕"/>
+                <a:latin typeface="Arial"/>
+                <a:ea typeface="맑은 고딕"/>
+                <a:cs typeface="Arial"/>
               </a:rPr>
               <a:t>Vercel CDN
 (Nginx-style)</a:t>
@@ -9111,8 +9355,9 @@
                 <a:solidFill>
                   <a:srgbClr val="475569"/>
                 </a:solidFill>
-                <a:latin typeface="맑은 고딕"/>
-                <a:ea typeface="맑은 고딕"/>
+                <a:latin typeface="Arial"/>
+                <a:ea typeface="맑은 고딕"/>
+                <a:cs typeface="Arial"/>
               </a:rPr>
               <a:t>정적 자원 + SPA fallback
 immutable cache + gzip</a:t>
@@ -9193,8 +9438,9 @@
                 <a:solidFill>
                   <a:srgbClr val="10B981"/>
                 </a:solidFill>
-                <a:latin typeface="맑은 고딕"/>
-                <a:ea typeface="맑은 고딕"/>
+                <a:latin typeface="Arial"/>
+                <a:ea typeface="맑은 고딕"/>
+                <a:cs typeface="Arial"/>
               </a:rPr>
               <a:t>Render Web Service
 (Docker)</a:t>
@@ -9230,8 +9476,9 @@
                 <a:solidFill>
                   <a:srgbClr val="475569"/>
                 </a:solidFill>
-                <a:latin typeface="맑은 고딕"/>
-                <a:ea typeface="맑은 고딕"/>
+                <a:latin typeface="Arial"/>
+                <a:ea typeface="맑은 고딕"/>
+                <a:cs typeface="Arial"/>
               </a:rPr>
               <a:t>Express + Prisma
 JWT · bcrypt · zod</a:t>
@@ -9312,8 +9559,9 @@
                 <a:solidFill>
                   <a:srgbClr val="E11D48"/>
                 </a:solidFill>
-                <a:latin typeface="맑은 고딕"/>
-                <a:ea typeface="맑은 고딕"/>
+                <a:latin typeface="Arial"/>
+                <a:ea typeface="맑은 고딕"/>
+                <a:cs typeface="Arial"/>
               </a:rPr>
               <a:t>Neon Postgres</a:t>
             </a:r>
@@ -9348,8 +9596,9 @@
                 <a:solidFill>
                   <a:srgbClr val="475569"/>
                 </a:solidFill>
-                <a:latin typeface="맑은 고딕"/>
-                <a:ea typeface="맑은 고딕"/>
+                <a:latin typeface="Arial"/>
+                <a:ea typeface="맑은 고딕"/>
+                <a:cs typeface="Arial"/>
               </a:rPr>
               <a:t>User · Task · Event
 1:N 관계</a:t>
@@ -9493,8 +9742,9 @@
                 <a:solidFill>
                   <a:srgbClr val="1D4ED8"/>
                 </a:solidFill>
-                <a:latin typeface="맑은 고딕"/>
-                <a:ea typeface="맑은 고딕"/>
+                <a:latin typeface="Arial"/>
+                <a:ea typeface="맑은 고딕"/>
+                <a:cs typeface="Arial"/>
               </a:rPr>
               <a:t>요청 흐름</a:t>
             </a:r>
@@ -9533,8 +9783,9 @@
                 <a:solidFill>
                   <a:srgbClr val="1D4ED8"/>
                 </a:solidFill>
-                <a:latin typeface="맑은 고딕"/>
-                <a:ea typeface="맑은 고딕"/>
+                <a:latin typeface="Arial"/>
+                <a:ea typeface="맑은 고딕"/>
+                <a:cs typeface="Arial"/>
               </a:rPr>
               <a:t>①  </a:t>
             </a:r>
@@ -9543,8 +9794,9 @@
                 <a:solidFill>
                   <a:srgbClr val="0F172A"/>
                 </a:solidFill>
-                <a:latin typeface="맑은 고딕"/>
-                <a:ea typeface="맑은 고딕"/>
+                <a:latin typeface="Arial"/>
+                <a:ea typeface="맑은 고딕"/>
+                <a:cs typeface="Arial"/>
               </a:rPr>
               <a:t>사용자는 Vercel 도메인으로 접속 → React 정적 자원이 즉시 응답 (Nginx 식 gzip + immutable cache)</a:t>
             </a:r>
@@ -9560,8 +9812,9 @@
                 <a:solidFill>
                   <a:srgbClr val="1D4ED8"/>
                 </a:solidFill>
-                <a:latin typeface="맑은 고딕"/>
-                <a:ea typeface="맑은 고딕"/>
+                <a:latin typeface="Arial"/>
+                <a:ea typeface="맑은 고딕"/>
+                <a:cs typeface="Arial"/>
               </a:rPr>
               <a:t>②  </a:t>
             </a:r>
@@ -9570,8 +9823,9 @@
                 <a:solidFill>
                   <a:srgbClr val="0F172A"/>
                 </a:solidFill>
-                <a:latin typeface="맑은 고딕"/>
-                <a:ea typeface="맑은 고딕"/>
+                <a:latin typeface="Arial"/>
+                <a:ea typeface="맑은 고딕"/>
+                <a:cs typeface="Arial"/>
               </a:rPr>
               <a:t>/api/* 요청은 axios 가 Render 백엔드로 직접 (build 시 VITE_API_BASE_URL inline)</a:t>
             </a:r>
@@ -9587,8 +9841,9 @@
                 <a:solidFill>
                   <a:srgbClr val="1D4ED8"/>
                 </a:solidFill>
-                <a:latin typeface="맑은 고딕"/>
-                <a:ea typeface="맑은 고딕"/>
+                <a:latin typeface="Arial"/>
+                <a:ea typeface="맑은 고딕"/>
+                <a:cs typeface="Arial"/>
               </a:rPr>
               <a:t>③  </a:t>
             </a:r>
@@ -9597,8 +9852,9 @@
                 <a:solidFill>
                   <a:srgbClr val="0F172A"/>
                 </a:solidFill>
-                <a:latin typeface="맑은 고딕"/>
-                <a:ea typeface="맑은 고딕"/>
+                <a:latin typeface="Arial"/>
+                <a:ea typeface="맑은 고딕"/>
+                <a:cs typeface="Arial"/>
               </a:rPr>
               <a:t>Express 는 JWT 검증 → Prisma → Neon Postgres SQL</a:t>
             </a:r>
@@ -9614,8 +9870,9 @@
                 <a:solidFill>
                   <a:srgbClr val="1D4ED8"/>
                 </a:solidFill>
-                <a:latin typeface="맑은 고딕"/>
-                <a:ea typeface="맑은 고딕"/>
+                <a:latin typeface="Arial"/>
+                <a:ea typeface="맑은 고딕"/>
+                <a:cs typeface="Arial"/>
               </a:rPr>
               <a:t>④  </a:t>
             </a:r>
@@ -9624,8 +9881,9 @@
                 <a:solidFill>
                   <a:srgbClr val="0F172A"/>
                 </a:solidFill>
-                <a:latin typeface="맑은 고딕"/>
-                <a:ea typeface="맑은 고딕"/>
+                <a:latin typeface="Arial"/>
+                <a:ea typeface="맑은 고딕"/>
+                <a:cs typeface="Arial"/>
               </a:rPr>
               <a:t>응답 데이터는 IndexedDB 에 캐시 → 오프라인/네트워크 장애 시 폴백</a:t>
             </a:r>
@@ -9660,8 +9918,9 @@
                 <a:solidFill>
                   <a:srgbClr val="475569"/>
                 </a:solidFill>
-                <a:latin typeface="맑은 고딕"/>
-                <a:ea typeface="맑은 고딕"/>
+                <a:latin typeface="Arial"/>
+                <a:ea typeface="맑은 고딕"/>
+                <a:cs typeface="Arial"/>
               </a:rPr>
               <a:t>PlanIt — 2026-1 Web Programming Final Project · 202100580 이정</a:t>
             </a:r>
@@ -9696,8 +9955,9 @@
                 <a:solidFill>
                   <a:srgbClr val="475569"/>
                 </a:solidFill>
-                <a:latin typeface="맑은 고딕"/>
-                <a:ea typeface="맑은 고딕"/>
+                <a:latin typeface="Arial"/>
+                <a:ea typeface="맑은 고딕"/>
+                <a:cs typeface="Arial"/>
               </a:rPr>
               <a:t>4 / 13</a:t>
             </a:r>
@@ -9793,8 +10053,9 @@
                 <a:solidFill>
                   <a:srgbClr val="FFFFFF"/>
                 </a:solidFill>
-                <a:latin typeface="맑은 고딕"/>
-                <a:ea typeface="맑은 고딕"/>
+                <a:latin typeface="Arial"/>
+                <a:ea typeface="맑은 고딕"/>
+                <a:cs typeface="Arial"/>
               </a:rPr>
               <a:t>기술 스택</a:t>
             </a:r>
@@ -9829,8 +10090,9 @@
                 <a:solidFill>
                   <a:srgbClr val="CBD5E1"/>
                 </a:solidFill>
-                <a:latin typeface="맑은 고딕"/>
-                <a:ea typeface="맑은 고딕"/>
+                <a:latin typeface="Arial"/>
+                <a:ea typeface="맑은 고딕"/>
+                <a:cs typeface="Arial"/>
               </a:rPr>
               <a:t>수업에서 다룬 요소 + 표준 브라우저 API</a:t>
             </a:r>
@@ -9865,8 +10127,9 @@
                 <a:solidFill>
                   <a:srgbClr val="CBD5E1"/>
                 </a:solidFill>
-                <a:latin typeface="맑은 고딕"/>
-                <a:ea typeface="맑은 고딕"/>
+                <a:latin typeface="Arial"/>
+                <a:ea typeface="맑은 고딕"/>
+                <a:cs typeface="Arial"/>
               </a:rPr>
               <a:t>5 / 13</a:t>
             </a:r>
@@ -9944,8 +10207,9 @@
                 <a:solidFill>
                   <a:srgbClr val="1D4ED8"/>
                 </a:solidFill>
-                <a:latin typeface="맑은 고딕"/>
-                <a:ea typeface="맑은 고딕"/>
+                <a:latin typeface="Arial"/>
+                <a:ea typeface="맑은 고딕"/>
+                <a:cs typeface="Arial"/>
               </a:rPr>
               <a:t>Frontend</a:t>
             </a:r>
@@ -9980,8 +10244,9 @@
                 <a:solidFill>
                   <a:srgbClr val="0F172A"/>
                 </a:solidFill>
-                <a:latin typeface="맑은 고딕"/>
-                <a:ea typeface="맑은 고딕"/>
+                <a:latin typeface="Arial"/>
+                <a:ea typeface="맑은 고딕"/>
+                <a:cs typeface="Arial"/>
               </a:rPr>
               <a:t>React · Vite · Tailwind · react-router-dom · react-big-calendar · axios · date-fns</a:t>
             </a:r>
@@ -10059,8 +10324,9 @@
                 <a:solidFill>
                   <a:srgbClr val="1D4ED8"/>
                 </a:solidFill>
-                <a:latin typeface="맑은 고딕"/>
-                <a:ea typeface="맑은 고딕"/>
+                <a:latin typeface="Arial"/>
+                <a:ea typeface="맑은 고딕"/>
+                <a:cs typeface="Arial"/>
               </a:rPr>
               <a:t>Backend</a:t>
             </a:r>
@@ -10095,8 +10361,9 @@
                 <a:solidFill>
                   <a:srgbClr val="0F172A"/>
                 </a:solidFill>
-                <a:latin typeface="맑은 고딕"/>
-                <a:ea typeface="맑은 고딕"/>
+                <a:latin typeface="Arial"/>
+                <a:ea typeface="맑은 고딕"/>
+                <a:cs typeface="Arial"/>
               </a:rPr>
               <a:t>Node 20 · Express · Prisma · JWT · bcrypt · zod · cors · morgan</a:t>
             </a:r>
@@ -10174,8 +10441,9 @@
                 <a:solidFill>
                   <a:srgbClr val="1D4ED8"/>
                 </a:solidFill>
-                <a:latin typeface="맑은 고딕"/>
-                <a:ea typeface="맑은 고딕"/>
+                <a:latin typeface="Arial"/>
+                <a:ea typeface="맑은 고딕"/>
+                <a:cs typeface="Arial"/>
               </a:rPr>
               <a:t>Database</a:t>
             </a:r>
@@ -10210,8 +10478,9 @@
                 <a:solidFill>
                   <a:srgbClr val="0F172A"/>
                 </a:solidFill>
-                <a:latin typeface="맑은 고딕"/>
-                <a:ea typeface="맑은 고딕"/>
+                <a:latin typeface="Arial"/>
+                <a:ea typeface="맑은 고딕"/>
+                <a:cs typeface="Arial"/>
               </a:rPr>
               <a:t>PostgreSQL 16 (Neon) · Prisma Migrate</a:t>
             </a:r>
@@ -10289,8 +10558,9 @@
                 <a:solidFill>
                   <a:srgbClr val="1D4ED8"/>
                 </a:solidFill>
-                <a:latin typeface="맑은 고딕"/>
-                <a:ea typeface="맑은 고딕"/>
+                <a:latin typeface="Arial"/>
+                <a:ea typeface="맑은 고딕"/>
+                <a:cs typeface="Arial"/>
               </a:rPr>
               <a:t>Container</a:t>
             </a:r>
@@ -10325,8 +10595,9 @@
                 <a:solidFill>
                   <a:srgbClr val="0F172A"/>
                 </a:solidFill>
-                <a:latin typeface="맑은 고딕"/>
-                <a:ea typeface="맑은 고딕"/>
+                <a:latin typeface="Arial"/>
+                <a:ea typeface="맑은 고딕"/>
+                <a:cs typeface="Arial"/>
               </a:rPr>
               <a:t>Docker (multi-stage) · docker compose (db/api/web 3 컨테이너)</a:t>
             </a:r>
@@ -10404,8 +10675,9 @@
                 <a:solidFill>
                   <a:srgbClr val="1D4ED8"/>
                 </a:solidFill>
-                <a:latin typeface="맑은 고딕"/>
-                <a:ea typeface="맑은 고딕"/>
+                <a:latin typeface="Arial"/>
+                <a:ea typeface="맑은 고딕"/>
+                <a:cs typeface="Arial"/>
               </a:rPr>
               <a:t>Reverse Proxy</a:t>
             </a:r>
@@ -10440,8 +10712,9 @@
                 <a:solidFill>
                   <a:srgbClr val="0F172A"/>
                 </a:solidFill>
-                <a:latin typeface="맑은 고딕"/>
-                <a:ea typeface="맑은 고딕"/>
+                <a:latin typeface="Arial"/>
+                <a:ea typeface="맑은 고딕"/>
+                <a:cs typeface="Arial"/>
               </a:rPr>
               <a:t>Nginx (gzip · immutable cache · SPA fallback · /api 리버스 프록시)</a:t>
             </a:r>
@@ -10519,8 +10792,9 @@
                 <a:solidFill>
                   <a:srgbClr val="1D4ED8"/>
                 </a:solidFill>
-                <a:latin typeface="맑은 고딕"/>
-                <a:ea typeface="맑은 고딕"/>
+                <a:latin typeface="Arial"/>
+                <a:ea typeface="맑은 고딕"/>
+                <a:cs typeface="Arial"/>
               </a:rPr>
               <a:t>Web Storage</a:t>
             </a:r>
@@ -10555,8 +10829,9 @@
                 <a:solidFill>
                   <a:srgbClr val="0F172A"/>
                 </a:solidFill>
-                <a:latin typeface="맑은 고딕"/>
-                <a:ea typeface="맑은 고딕"/>
+                <a:latin typeface="Arial"/>
+                <a:ea typeface="맑은 고딕"/>
+                <a:cs typeface="Arial"/>
               </a:rPr>
               <a:t>localStorage · sessionStorage · IndexedDB · Notification API</a:t>
             </a:r>
@@ -10634,8 +10909,9 @@
                 <a:solidFill>
                   <a:srgbClr val="1D4ED8"/>
                 </a:solidFill>
-                <a:latin typeface="맑은 고딕"/>
-                <a:ea typeface="맑은 고딕"/>
+                <a:latin typeface="Arial"/>
+                <a:ea typeface="맑은 고딕"/>
+                <a:cs typeface="Arial"/>
               </a:rPr>
               <a:t>CI/CD</a:t>
             </a:r>
@@ -10670,8 +10946,9 @@
                 <a:solidFill>
                   <a:srgbClr val="0F172A"/>
                 </a:solidFill>
-                <a:latin typeface="맑은 고딕"/>
-                <a:ea typeface="맑은 고딕"/>
+                <a:latin typeface="Arial"/>
+                <a:ea typeface="맑은 고딕"/>
+                <a:cs typeface="Arial"/>
               </a:rPr>
               <a:t>GitHub Actions (ci.yml + deploy.yml) · Vercel · Render autoDeploy</a:t>
             </a:r>
@@ -10706,8 +10983,9 @@
                 <a:solidFill>
                   <a:srgbClr val="475569"/>
                 </a:solidFill>
-                <a:latin typeface="맑은 고딕"/>
-                <a:ea typeface="맑은 고딕"/>
+                <a:latin typeface="Arial"/>
+                <a:ea typeface="맑은 고딕"/>
+                <a:cs typeface="Arial"/>
               </a:rPr>
               <a:t>PlanIt — 2026-1 Web Programming Final Project · 202100580 이정</a:t>
             </a:r>
@@ -10742,8 +11020,9 @@
                 <a:solidFill>
                   <a:srgbClr val="475569"/>
                 </a:solidFill>
-                <a:latin typeface="맑은 고딕"/>
-                <a:ea typeface="맑은 고딕"/>
+                <a:latin typeface="Arial"/>
+                <a:ea typeface="맑은 고딕"/>
+                <a:cs typeface="Arial"/>
               </a:rPr>
               <a:t>5 / 13</a:t>
             </a:r>
@@ -10839,8 +11118,9 @@
                 <a:solidFill>
                   <a:srgbClr val="FFFFFF"/>
                 </a:solidFill>
-                <a:latin typeface="맑은 고딕"/>
-                <a:ea typeface="맑은 고딕"/>
+                <a:latin typeface="Arial"/>
+                <a:ea typeface="맑은 고딕"/>
+                <a:cs typeface="Arial"/>
               </a:rPr>
               <a:t>DBMS 활용 — PostgreSQL + Prisma + Neon</a:t>
             </a:r>
@@ -10875,8 +11155,9 @@
                 <a:solidFill>
                   <a:srgbClr val="CBD5E1"/>
                 </a:solidFill>
-                <a:latin typeface="맑은 고딕"/>
-                <a:ea typeface="맑은 고딕"/>
+                <a:latin typeface="Arial"/>
+                <a:ea typeface="맑은 고딕"/>
+                <a:cs typeface="Arial"/>
               </a:rPr>
               <a:t>조건 ③ — 영속 데이터의 1:N 관계 모델</a:t>
             </a:r>
@@ -10911,8 +11192,9 @@
                 <a:solidFill>
                   <a:srgbClr val="CBD5E1"/>
                 </a:solidFill>
-                <a:latin typeface="맑은 고딕"/>
-                <a:ea typeface="맑은 고딕"/>
+                <a:latin typeface="Arial"/>
+                <a:ea typeface="맑은 고딕"/>
+                <a:cs typeface="Arial"/>
               </a:rPr>
               <a:t>6 / 13</a:t>
             </a:r>
@@ -10992,8 +11274,9 @@
                 <a:solidFill>
                   <a:srgbClr val="1D4ED8"/>
                 </a:solidFill>
-                <a:latin typeface="맑은 고딕"/>
-                <a:ea typeface="맑은 고딕"/>
+                <a:latin typeface="Arial"/>
+                <a:ea typeface="맑은 고딕"/>
+                <a:cs typeface="Arial"/>
               </a:rPr>
               <a:t>📐 도메인 모델 (Prisma schema)</a:t>
             </a:r>
@@ -11029,6 +11312,7 @@
                 </a:solidFill>
                 <a:latin typeface="Consolas"/>
                 <a:ea typeface="Consolas"/>
+                <a:cs typeface="Consolas"/>
               </a:rPr>
               <a:t>model User  { id  email(unique)  password  name?  ... }</a:t>
             </a:r>
@@ -11041,6 +11325,7 @@
                 </a:solidFill>
                 <a:latin typeface="Consolas"/>
                 <a:ea typeface="Consolas"/>
+                <a:cs typeface="Consolas"/>
               </a:rPr>
               <a:t>model Task  { id  userId  title  description?  dueAt?</a:t>
             </a:r>
@@ -11053,6 +11338,7 @@
                 </a:solidFill>
                 <a:latin typeface="Consolas"/>
                 <a:ea typeface="Consolas"/>
+                <a:cs typeface="Consolas"/>
               </a:rPr>
               <a:t>              priority(LOW|MEDIUM|HIGH)  completed  ... }</a:t>
             </a:r>
@@ -11065,6 +11351,7 @@
                 </a:solidFill>
                 <a:latin typeface="Consolas"/>
                 <a:ea typeface="Consolas"/>
+                <a:cs typeface="Consolas"/>
               </a:rPr>
               <a:t>model Event { id  userId  title  location?  startAt  endAt  ... }</a:t>
             </a:r>
@@ -11077,6 +11364,7 @@
                 </a:solidFill>
                 <a:latin typeface="Consolas"/>
                 <a:ea typeface="Consolas"/>
+                <a:cs typeface="Consolas"/>
               </a:rPr>
               <a:t/>
             </a:r>
@@ -11089,6 +11377,7 @@
                 </a:solidFill>
                 <a:latin typeface="Consolas"/>
                 <a:ea typeface="Consolas"/>
+                <a:cs typeface="Consolas"/>
               </a:rPr>
               <a:t>User 1 ──&lt; Task   (마감일이 있는 작업)</a:t>
             </a:r>
@@ -11101,6 +11390,7 @@
                 </a:solidFill>
                 <a:latin typeface="Consolas"/>
                 <a:ea typeface="Consolas"/>
+                <a:cs typeface="Consolas"/>
               </a:rPr>
               <a:t>User 1 ──&lt; Event  (시각이 고정된 일정)</a:t>
             </a:r>
@@ -11113,6 +11403,7 @@
                 </a:solidFill>
                 <a:latin typeface="Consolas"/>
                 <a:ea typeface="Consolas"/>
+                <a:cs typeface="Consolas"/>
               </a:rPr>
               <a:t/>
             </a:r>
@@ -11125,6 +11416,7 @@
                 </a:solidFill>
                 <a:latin typeface="Consolas"/>
                 <a:ea typeface="Consolas"/>
+                <a:cs typeface="Consolas"/>
               </a:rPr>
               <a:t>@@index([userId, dueAt])           ─ 대시보드 쿼리 가속</a:t>
             </a:r>
@@ -11137,6 +11429,7 @@
                 </a:solidFill>
                 <a:latin typeface="Consolas"/>
                 <a:ea typeface="Consolas"/>
+                <a:cs typeface="Consolas"/>
               </a:rPr>
               <a:t>@@index([userId, startAt])         ─ 캘린더 범위 쿼리</a:t>
             </a:r>
@@ -11149,6 +11442,7 @@
                 </a:solidFill>
                 <a:latin typeface="Consolas"/>
                 <a:ea typeface="Consolas"/>
+                <a:cs typeface="Consolas"/>
               </a:rPr>
               <a:t>onDelete: Cascade                  ─ 계정 삭제 시 정리</a:t>
             </a:r>
@@ -11228,8 +11522,9 @@
                 <a:solidFill>
                   <a:srgbClr val="1D4ED8"/>
                 </a:solidFill>
-                <a:latin typeface="맑은 고딕"/>
-                <a:ea typeface="맑은 고딕"/>
+                <a:latin typeface="Arial"/>
+                <a:ea typeface="맑은 고딕"/>
+                <a:cs typeface="Arial"/>
               </a:rPr>
               <a:t>🚀 운영 포인트</a:t>
             </a:r>
@@ -11268,8 +11563,9 @@
                 <a:solidFill>
                   <a:srgbClr val="1D4ED8"/>
                 </a:solidFill>
-                <a:latin typeface="맑은 고딕"/>
-                <a:ea typeface="맑은 고딕"/>
+                <a:latin typeface="Arial"/>
+                <a:ea typeface="맑은 고딕"/>
+                <a:cs typeface="Arial"/>
               </a:rPr>
               <a:t>Prisma  </a:t>
             </a:r>
@@ -11278,8 +11574,9 @@
                 <a:solidFill>
                   <a:srgbClr val="0F172A"/>
                 </a:solidFill>
-                <a:latin typeface="맑은 고딕"/>
-                <a:ea typeface="맑은 고딕"/>
+                <a:latin typeface="Arial"/>
+                <a:ea typeface="맑은 고딕"/>
+                <a:cs typeface="Arial"/>
               </a:rPr>
               <a:t>스키마 우선 · 타입 안전 · migrate deploy 로 운영 일치</a:t>
             </a:r>
@@ -11295,8 +11592,9 @@
                 <a:solidFill>
                   <a:srgbClr val="1D4ED8"/>
                 </a:solidFill>
-                <a:latin typeface="맑은 고딕"/>
-                <a:ea typeface="맑은 고딕"/>
+                <a:latin typeface="Arial"/>
+                <a:ea typeface="맑은 고딕"/>
+                <a:cs typeface="Arial"/>
               </a:rPr>
               <a:t>Neon  </a:t>
             </a:r>
@@ -11305,8 +11603,9 @@
                 <a:solidFill>
                   <a:srgbClr val="0F172A"/>
                 </a:solidFill>
-                <a:latin typeface="맑은 고딕"/>
-                <a:ea typeface="맑은 고딕"/>
+                <a:latin typeface="Arial"/>
+                <a:ea typeface="맑은 고딕"/>
+                <a:cs typeface="Arial"/>
               </a:rPr>
               <a:t>Serverless Postgres · 무료 플랜 · Connection Pooling</a:t>
             </a:r>
@@ -11322,8 +11621,9 @@
                 <a:solidFill>
                   <a:srgbClr val="1D4ED8"/>
                 </a:solidFill>
-                <a:latin typeface="맑은 고딕"/>
-                <a:ea typeface="맑은 고딕"/>
+                <a:latin typeface="Arial"/>
+                <a:ea typeface="맑은 고딕"/>
+                <a:cs typeface="Arial"/>
               </a:rPr>
               <a:t>SSL  </a:t>
             </a:r>
@@ -11332,8 +11632,9 @@
                 <a:solidFill>
                   <a:srgbClr val="0F172A"/>
                 </a:solidFill>
-                <a:latin typeface="맑은 고딕"/>
-                <a:ea typeface="맑은 고딕"/>
+                <a:latin typeface="Arial"/>
+                <a:ea typeface="맑은 고딕"/>
+                <a:cs typeface="Arial"/>
               </a:rPr>
               <a:t>sslmode=require + channel_binding=require</a:t>
             </a:r>
@@ -11349,8 +11650,9 @@
                 <a:solidFill>
                   <a:srgbClr val="1D4ED8"/>
                 </a:solidFill>
-                <a:latin typeface="맑은 고딕"/>
-                <a:ea typeface="맑은 고딕"/>
+                <a:latin typeface="Arial"/>
+                <a:ea typeface="맑은 고딕"/>
+                <a:cs typeface="Arial"/>
               </a:rPr>
               <a:t>Index  </a:t>
             </a:r>
@@ -11359,8 +11661,9 @@
                 <a:solidFill>
                   <a:srgbClr val="0F172A"/>
                 </a:solidFill>
-                <a:latin typeface="맑은 고딕"/>
-                <a:ea typeface="맑은 고딕"/>
+                <a:latin typeface="Arial"/>
+                <a:ea typeface="맑은 고딕"/>
+                <a:cs typeface="Arial"/>
               </a:rPr>
               <a:t>사용자 + 마감/시작 시각 복합 인덱스</a:t>
             </a:r>
@@ -11376,8 +11679,9 @@
                 <a:solidFill>
                   <a:srgbClr val="1D4ED8"/>
                 </a:solidFill>
-                <a:latin typeface="맑은 고딕"/>
-                <a:ea typeface="맑은 고딕"/>
+                <a:latin typeface="Arial"/>
+                <a:ea typeface="맑은 고딕"/>
+                <a:cs typeface="Arial"/>
               </a:rPr>
               <a:t>ORM 가드  </a:t>
             </a:r>
@@ -11386,8 +11690,9 @@
                 <a:solidFill>
                   <a:srgbClr val="0F172A"/>
                 </a:solidFill>
-                <a:latin typeface="맑은 고딕"/>
-                <a:ea typeface="맑은 고딕"/>
+                <a:latin typeface="Arial"/>
+                <a:ea typeface="맑은 고딕"/>
+                <a:cs typeface="Arial"/>
               </a:rPr>
               <a:t>zod 유효성 + Prisma 타입 = SQL 인젝션 차단</a:t>
             </a:r>
@@ -11403,8 +11708,9 @@
                 <a:solidFill>
                   <a:srgbClr val="1D4ED8"/>
                 </a:solidFill>
-                <a:latin typeface="맑은 고딕"/>
-                <a:ea typeface="맑은 고딕"/>
+                <a:latin typeface="Arial"/>
+                <a:ea typeface="맑은 고딕"/>
+                <a:cs typeface="Arial"/>
               </a:rPr>
               <a:t>Migration  </a:t>
             </a:r>
@@ -11413,8 +11719,9 @@
                 <a:solidFill>
                   <a:srgbClr val="0F172A"/>
                 </a:solidFill>
-                <a:latin typeface="맑은 고딕"/>
-                <a:ea typeface="맑은 고딕"/>
+                <a:latin typeface="Arial"/>
+                <a:ea typeface="맑은 고딕"/>
+                <a:cs typeface="Arial"/>
               </a:rPr>
               <a:t>prisma/migrations/20260607070117_init</a:t>
             </a:r>
@@ -11449,8 +11756,9 @@
                 <a:solidFill>
                   <a:srgbClr val="475569"/>
                 </a:solidFill>
-                <a:latin typeface="맑은 고딕"/>
-                <a:ea typeface="맑은 고딕"/>
+                <a:latin typeface="Arial"/>
+                <a:ea typeface="맑은 고딕"/>
+                <a:cs typeface="Arial"/>
               </a:rPr>
               <a:t>PlanIt — 2026-1 Web Programming Final Project · 202100580 이정</a:t>
             </a:r>
@@ -11485,8 +11793,9 @@
                 <a:solidFill>
                   <a:srgbClr val="475569"/>
                 </a:solidFill>
-                <a:latin typeface="맑은 고딕"/>
-                <a:ea typeface="맑은 고딕"/>
+                <a:latin typeface="Arial"/>
+                <a:ea typeface="맑은 고딕"/>
+                <a:cs typeface="Arial"/>
               </a:rPr>
               <a:t>6 / 13</a:t>
             </a:r>
@@ -11582,8 +11891,9 @@
                 <a:solidFill>
                   <a:srgbClr val="FFFFFF"/>
                 </a:solidFill>
-                <a:latin typeface="맑은 고딕"/>
-                <a:ea typeface="맑은 고딕"/>
+                <a:latin typeface="Arial"/>
+                <a:ea typeface="맑은 고딕"/>
+                <a:cs typeface="Arial"/>
               </a:rPr>
               <a:t>Web Storage 활용 — 4계층 저장소 분담</a:t>
             </a:r>
@@ -11618,8 +11928,9 @@
                 <a:solidFill>
                   <a:srgbClr val="CBD5E1"/>
                 </a:solidFill>
-                <a:latin typeface="맑은 고딕"/>
-                <a:ea typeface="맑은 고딕"/>
+                <a:latin typeface="Arial"/>
+                <a:ea typeface="맑은 고딕"/>
+                <a:cs typeface="Arial"/>
               </a:rPr>
               <a:t>조건 ③ — 데이터 수명 · 범위에 맞춘 분리</a:t>
             </a:r>
@@ -11654,8 +11965,9 @@
                 <a:solidFill>
                   <a:srgbClr val="CBD5E1"/>
                 </a:solidFill>
-                <a:latin typeface="맑은 고딕"/>
-                <a:ea typeface="맑은 고딕"/>
+                <a:latin typeface="Arial"/>
+                <a:ea typeface="맑은 고딕"/>
+                <a:cs typeface="Arial"/>
               </a:rPr>
               <a:t>7 / 13</a:t>
             </a:r>
@@ -11733,8 +12045,9 @@
                 <a:solidFill>
                   <a:srgbClr val="FFFFFF"/>
                 </a:solidFill>
-                <a:latin typeface="맑은 고딕"/>
-                <a:ea typeface="맑은 고딕"/>
+                <a:latin typeface="Arial"/>
+                <a:ea typeface="맑은 고딕"/>
+                <a:cs typeface="Arial"/>
               </a:rPr>
               <a:t>저장소</a:t>
             </a:r>
@@ -11769,8 +12082,9 @@
                 <a:solidFill>
                   <a:srgbClr val="FFFFFF"/>
                 </a:solidFill>
-                <a:latin typeface="맑은 고딕"/>
-                <a:ea typeface="맑은 고딕"/>
+                <a:latin typeface="Arial"/>
+                <a:ea typeface="맑은 고딕"/>
+                <a:cs typeface="Arial"/>
               </a:rPr>
               <a:t>성격</a:t>
             </a:r>
@@ -11805,8 +12119,9 @@
                 <a:solidFill>
                   <a:srgbClr val="FFFFFF"/>
                 </a:solidFill>
-                <a:latin typeface="맑은 고딕"/>
-                <a:ea typeface="맑은 고딕"/>
+                <a:latin typeface="Arial"/>
+                <a:ea typeface="맑은 고딕"/>
+                <a:cs typeface="Arial"/>
               </a:rPr>
               <a:t>실제 활용 위치</a:t>
             </a:r>
@@ -11927,8 +12242,9 @@
                 <a:solidFill>
                   <a:srgbClr val="1D4ED8"/>
                 </a:solidFill>
-                <a:latin typeface="맑은 고딕"/>
-                <a:ea typeface="맑은 고딕"/>
+                <a:latin typeface="Arial"/>
+                <a:ea typeface="맑은 고딕"/>
+                <a:cs typeface="Arial"/>
               </a:rPr>
               <a:t>PostgreSQL</a:t>
             </a:r>
@@ -11963,8 +12279,9 @@
                 <a:solidFill>
                   <a:srgbClr val="0F172A"/>
                 </a:solidFill>
-                <a:latin typeface="맑은 고딕"/>
-                <a:ea typeface="맑은 고딕"/>
+                <a:latin typeface="Arial"/>
+                <a:ea typeface="맑은 고딕"/>
+                <a:cs typeface="Arial"/>
               </a:rPr>
               <a:t>영속 · 다기기 일관성</a:t>
             </a:r>
@@ -11999,8 +12316,9 @@
                 <a:solidFill>
                   <a:srgbClr val="0F172A"/>
                 </a:solidFill>
-                <a:latin typeface="맑은 고딕"/>
-                <a:ea typeface="맑은 고딕"/>
+                <a:latin typeface="Arial"/>
+                <a:ea typeface="맑은 고딕"/>
+                <a:cs typeface="Arial"/>
               </a:rPr>
               <a:t>User · Task · Event 본체</a:t>
             </a:r>
@@ -12121,8 +12439,9 @@
                 <a:solidFill>
                   <a:srgbClr val="10B981"/>
                 </a:solidFill>
-                <a:latin typeface="맑은 고딕"/>
-                <a:ea typeface="맑은 고딕"/>
+                <a:latin typeface="Arial"/>
+                <a:ea typeface="맑은 고딕"/>
+                <a:cs typeface="Arial"/>
               </a:rPr>
               <a:t>localStorage</a:t>
             </a:r>
@@ -12157,8 +12476,9 @@
                 <a:solidFill>
                   <a:srgbClr val="0F172A"/>
                 </a:solidFill>
-                <a:latin typeface="맑은 고딕"/>
-                <a:ea typeface="맑은 고딕"/>
+                <a:latin typeface="Arial"/>
+                <a:ea typeface="맑은 고딕"/>
+                <a:cs typeface="Arial"/>
               </a:rPr>
               <a:t>영구 · 같은 브라우저</a:t>
             </a:r>
@@ -12193,8 +12513,9 @@
                 <a:solidFill>
                   <a:srgbClr val="0F172A"/>
                 </a:solidFill>
-                <a:latin typeface="맑은 고딕"/>
-                <a:ea typeface="맑은 고딕"/>
+                <a:latin typeface="Arial"/>
+                <a:ea typeface="맑은 고딕"/>
+                <a:cs typeface="Arial"/>
               </a:rPr>
               <a:t>JWT (planit.token) · 테마 (planit.theme) · 알림 발송 기록</a:t>
             </a:r>
@@ -12315,8 +12636,9 @@
                 <a:solidFill>
                   <a:srgbClr val="F59E0B"/>
                 </a:solidFill>
-                <a:latin typeface="맑은 고딕"/>
-                <a:ea typeface="맑은 고딕"/>
+                <a:latin typeface="Arial"/>
+                <a:ea typeface="맑은 고딕"/>
+                <a:cs typeface="Arial"/>
               </a:rPr>
               <a:t>sessionStorage</a:t>
             </a:r>
@@ -12351,8 +12673,9 @@
                 <a:solidFill>
                   <a:srgbClr val="0F172A"/>
                 </a:solidFill>
-                <a:latin typeface="맑은 고딕"/>
-                <a:ea typeface="맑은 고딕"/>
+                <a:latin typeface="Arial"/>
+                <a:ea typeface="맑은 고딕"/>
+                <a:cs typeface="Arial"/>
               </a:rPr>
               <a:t>탭 수명 · 새로고침 보존</a:t>
             </a:r>
@@ -12387,8 +12710,9 @@
                 <a:solidFill>
                   <a:srgbClr val="0F172A"/>
                 </a:solidFill>
-                <a:latin typeface="맑은 고딕"/>
-                <a:ea typeface="맑은 고딕"/>
+                <a:latin typeface="Arial"/>
+                <a:ea typeface="맑은 고딕"/>
+                <a:cs typeface="Arial"/>
               </a:rPr>
               <a:t>할 일 검색어/우선순위 · 캘린더 마지막 본 월</a:t>
             </a:r>
@@ -12509,8 +12833,9 @@
                 <a:solidFill>
                   <a:srgbClr val="E11D48"/>
                 </a:solidFill>
-                <a:latin typeface="맑은 고딕"/>
-                <a:ea typeface="맑은 고딕"/>
+                <a:latin typeface="Arial"/>
+                <a:ea typeface="맑은 고딕"/>
+                <a:cs typeface="Arial"/>
               </a:rPr>
               <a:t>IndexedDB</a:t>
             </a:r>
@@ -12545,8 +12870,9 @@
                 <a:solidFill>
                   <a:srgbClr val="0F172A"/>
                 </a:solidFill>
-                <a:latin typeface="맑은 고딕"/>
-                <a:ea typeface="맑은 고딕"/>
+                <a:latin typeface="Arial"/>
+                <a:ea typeface="맑은 고딕"/>
+                <a:cs typeface="Arial"/>
               </a:rPr>
               <a:t>비동기 객체 저장 · 오프라인 캐시</a:t>
             </a:r>
@@ -12581,8 +12907,9 @@
                 <a:solidFill>
                   <a:srgbClr val="0F172A"/>
                 </a:solidFill>
-                <a:latin typeface="맑은 고딕"/>
-                <a:ea typeface="맑은 고딕"/>
+                <a:latin typeface="Arial"/>
+                <a:ea typeface="맑은 고딕"/>
+                <a:cs typeface="Arial"/>
               </a:rPr>
               <a:t>tasks/events 캐시 → 네트워크 실패 시 폴백</a:t>
             </a:r>
@@ -12661,6 +12988,7 @@
                 </a:solidFill>
                 <a:latin typeface="Consolas"/>
                 <a:ea typeface="Consolas"/>
+                <a:cs typeface="Consolas"/>
               </a:rPr>
               <a:t>client/src/api/client.js  ─  JWT 자동 첨부</a:t>
             </a:r>
@@ -12673,6 +13001,7 @@
                 </a:solidFill>
                 <a:latin typeface="Consolas"/>
                 <a:ea typeface="Consolas"/>
+                <a:cs typeface="Consolas"/>
               </a:rPr>
               <a:t>client/src/lib/idbCache.js ─  IndexedDB 캐시 read/write</a:t>
             </a:r>
@@ -12685,6 +13014,7 @@
                 </a:solidFill>
                 <a:latin typeface="Consolas"/>
                 <a:ea typeface="Consolas"/>
+                <a:cs typeface="Consolas"/>
               </a:rPr>
               <a:t>client/src/pages/Tasks.jsx ─  sessionStorage 로 검색어 유지</a:t>
             </a:r>
@@ -12697,6 +13027,7 @@
                 </a:solidFill>
                 <a:latin typeface="Consolas"/>
                 <a:ea typeface="Consolas"/>
+                <a:cs typeface="Consolas"/>
               </a:rPr>
               <a:t>client/src/hooks/useDueNotifier.js ─  Notification API + localStorage 중복 방지</a:t>
             </a:r>
@@ -12731,8 +13062,9 @@
                 <a:solidFill>
                   <a:srgbClr val="475569"/>
                 </a:solidFill>
-                <a:latin typeface="맑은 고딕"/>
-                <a:ea typeface="맑은 고딕"/>
+                <a:latin typeface="Arial"/>
+                <a:ea typeface="맑은 고딕"/>
+                <a:cs typeface="Arial"/>
               </a:rPr>
               <a:t>PlanIt — 2026-1 Web Programming Final Project · 202100580 이정</a:t>
             </a:r>
@@ -12767,8 +13099,9 @@
                 <a:solidFill>
                   <a:srgbClr val="475569"/>
                 </a:solidFill>
-                <a:latin typeface="맑은 고딕"/>
-                <a:ea typeface="맑은 고딕"/>
+                <a:latin typeface="Arial"/>
+                <a:ea typeface="맑은 고딕"/>
+                <a:cs typeface="Arial"/>
               </a:rPr>
               <a:t>7 / 13</a:t>
             </a:r>
@@ -12864,8 +13197,9 @@
                 <a:solidFill>
                   <a:srgbClr val="FFFFFF"/>
                 </a:solidFill>
-                <a:latin typeface="맑은 고딕"/>
-                <a:ea typeface="맑은 고딕"/>
+                <a:latin typeface="Arial"/>
+                <a:ea typeface="맑은 고딕"/>
+                <a:cs typeface="Arial"/>
               </a:rPr>
               <a:t>Docker 컨테이너 구성</a:t>
             </a:r>
@@ -12900,8 +13234,9 @@
                 <a:solidFill>
                   <a:srgbClr val="CBD5E1"/>
                 </a:solidFill>
-                <a:latin typeface="맑은 고딕"/>
-                <a:ea typeface="맑은 고딕"/>
+                <a:latin typeface="Arial"/>
+                <a:ea typeface="맑은 고딕"/>
+                <a:cs typeface="Arial"/>
               </a:rPr>
               <a:t>조건 ② — 한 번의 compose up 으로 운영 환경 재현</a:t>
             </a:r>
@@ -12936,8 +13271,9 @@
                 <a:solidFill>
                   <a:srgbClr val="CBD5E1"/>
                 </a:solidFill>
-                <a:latin typeface="맑은 고딕"/>
-                <a:ea typeface="맑은 고딕"/>
+                <a:latin typeface="Arial"/>
+                <a:ea typeface="맑은 고딕"/>
+                <a:cs typeface="Arial"/>
               </a:rPr>
               <a:t>8 / 13</a:t>
             </a:r>
@@ -13017,8 +13353,9 @@
                 <a:solidFill>
                   <a:srgbClr val="1D4ED8"/>
                 </a:solidFill>
-                <a:latin typeface="맑은 고딕"/>
-                <a:ea typeface="맑은 고딕"/>
+                <a:latin typeface="Arial"/>
+                <a:ea typeface="맑은 고딕"/>
+                <a:cs typeface="Arial"/>
               </a:rPr>
               <a:t>🐳 docker-compose 토폴로지</a:t>
             </a:r>
@@ -13098,8 +13435,9 @@
                 <a:solidFill>
                   <a:srgbClr val="0F172A"/>
                 </a:solidFill>
-                <a:latin typeface="맑은 고딕"/>
-                <a:ea typeface="맑은 고딕"/>
+                <a:latin typeface="Arial"/>
+                <a:ea typeface="맑은 고딕"/>
+                <a:cs typeface="Arial"/>
               </a:rPr>
               <a:t>web — Nginx (planit-web)
 :8080 → 80 · 정적 + /api 프록시 + gzip</a:t>
@@ -13180,8 +13518,9 @@
                 <a:solidFill>
                   <a:srgbClr val="0F172A"/>
                 </a:solidFill>
-                <a:latin typeface="맑은 고딕"/>
-                <a:ea typeface="맑은 고딕"/>
+                <a:latin typeface="Arial"/>
+                <a:ea typeface="맑은 고딕"/>
+                <a:cs typeface="Arial"/>
               </a:rPr>
               <a:t>api — Express + Prisma (planit-api)
 :4000 · migrate deploy → node src/index.js</a:t>
@@ -13262,8 +13601,9 @@
                 <a:solidFill>
                   <a:srgbClr val="0F172A"/>
                 </a:solidFill>
-                <a:latin typeface="맑은 고딕"/>
-                <a:ea typeface="맑은 고딕"/>
+                <a:latin typeface="Arial"/>
+                <a:ea typeface="맑은 고딕"/>
+                <a:cs typeface="Arial"/>
               </a:rPr>
               <a:t>db — postgres:16-alpine
 :5434 → 5432 · planit-db 볼륨 영속</a:t>
@@ -13371,8 +13711,9 @@
                 <a:solidFill>
                   <a:srgbClr val="475569"/>
                 </a:solidFill>
-                <a:latin typeface="맑은 고딕"/>
-                <a:ea typeface="맑은 고딕"/>
+                <a:latin typeface="Arial"/>
+                <a:ea typeface="맑은 고딕"/>
+                <a:cs typeface="Arial"/>
               </a:rPr>
               <a:t>depends_on healthcheck → db 가 ready 일 때만 api 시작
 nginx.conf 는 volume mount → 재빌드 없이 라우팅 수정 가능</a:t>
@@ -13453,8 +13794,9 @@
                 <a:solidFill>
                   <a:srgbClr val="1D4ED8"/>
                 </a:solidFill>
-                <a:latin typeface="맑은 고딕"/>
-                <a:ea typeface="맑은 고딕"/>
+                <a:latin typeface="Arial"/>
+                <a:ea typeface="맑은 고딕"/>
+                <a:cs typeface="Arial"/>
               </a:rPr>
               <a:t>🔧 기술 포인트</a:t>
             </a:r>
@@ -13493,8 +13835,9 @@
                 <a:solidFill>
                   <a:srgbClr val="1D4ED8"/>
                 </a:solidFill>
-                <a:latin typeface="맑은 고딕"/>
-                <a:ea typeface="맑은 고딕"/>
+                <a:latin typeface="Arial"/>
+                <a:ea typeface="맑은 고딕"/>
+                <a:cs typeface="Arial"/>
               </a:rPr>
               <a:t>Multi-stage build  </a:t>
             </a:r>
@@ -13503,8 +13846,9 @@
                 <a:solidFill>
                   <a:srgbClr val="0F172A"/>
                 </a:solidFill>
-                <a:latin typeface="맑은 고딕"/>
-                <a:ea typeface="맑은 고딕"/>
+                <a:latin typeface="Arial"/>
+                <a:ea typeface="맑은 고딕"/>
+                <a:cs typeface="Arial"/>
               </a:rPr>
               <a:t>deps → build (prisma generate) → runtime · 이미지 슬림화</a:t>
             </a:r>
@@ -13520,8 +13864,9 @@
                 <a:solidFill>
                   <a:srgbClr val="1D4ED8"/>
                 </a:solidFill>
-                <a:latin typeface="맑은 고딕"/>
-                <a:ea typeface="맑은 고딕"/>
+                <a:latin typeface="Arial"/>
+                <a:ea typeface="맑은 고딕"/>
+                <a:cs typeface="Arial"/>
               </a:rPr>
               <a:t>node:20-slim  </a:t>
             </a:r>
@@ -13530,8 +13875,9 @@
                 <a:solidFill>
                   <a:srgbClr val="0F172A"/>
                 </a:solidFill>
-                <a:latin typeface="맑은 고딕"/>
-                <a:ea typeface="맑은 고딕"/>
+                <a:latin typeface="Arial"/>
+                <a:ea typeface="맑은 고딕"/>
+                <a:cs typeface="Arial"/>
               </a:rPr>
               <a:t>Prisma + Alpine OpenSSL 이슈 회피 → 안정적 Debian 베이스</a:t>
             </a:r>
@@ -13547,8 +13893,9 @@
                 <a:solidFill>
                   <a:srgbClr val="1D4ED8"/>
                 </a:solidFill>
-                <a:latin typeface="맑은 고딕"/>
-                <a:ea typeface="맑은 고딕"/>
+                <a:latin typeface="Arial"/>
+                <a:ea typeface="맑은 고딕"/>
+                <a:cs typeface="Arial"/>
               </a:rPr>
               <a:t>binaryTargets  </a:t>
             </a:r>
@@ -13557,8 +13904,9 @@
                 <a:solidFill>
                   <a:srgbClr val="0F172A"/>
                 </a:solidFill>
-                <a:latin typeface="맑은 고딕"/>
-                <a:ea typeface="맑은 고딕"/>
+                <a:latin typeface="Arial"/>
+                <a:ea typeface="맑은 고딕"/>
+                <a:cs typeface="Arial"/>
               </a:rPr>
               <a:t>debian-openssl-3.0.x 명시로 production 런타임 호환</a:t>
             </a:r>
@@ -13574,8 +13922,9 @@
                 <a:solidFill>
                   <a:srgbClr val="1D4ED8"/>
                 </a:solidFill>
-                <a:latin typeface="맑은 고딕"/>
-                <a:ea typeface="맑은 고딕"/>
+                <a:latin typeface="Arial"/>
+                <a:ea typeface="맑은 고딕"/>
+                <a:cs typeface="Arial"/>
               </a:rPr>
               <a:t>Health gate  </a:t>
             </a:r>
@@ -13584,8 +13933,9 @@
                 <a:solidFill>
                   <a:srgbClr val="0F172A"/>
                 </a:solidFill>
-                <a:latin typeface="맑은 고딕"/>
-                <a:ea typeface="맑은 고딕"/>
+                <a:latin typeface="Arial"/>
+                <a:ea typeface="맑은 고딕"/>
+                <a:cs typeface="Arial"/>
               </a:rPr>
               <a:t>pg_isready 헬스체크 통과 후 api 부팅</a:t>
             </a:r>
@@ -13601,8 +13951,9 @@
                 <a:solidFill>
                   <a:srgbClr val="1D4ED8"/>
                 </a:solidFill>
-                <a:latin typeface="맑은 고딕"/>
-                <a:ea typeface="맑은 고딕"/>
+                <a:latin typeface="Arial"/>
+                <a:ea typeface="맑은 고딕"/>
+                <a:cs typeface="Arial"/>
               </a:rPr>
               <a:t>Volume  </a:t>
             </a:r>
@@ -13611,8 +13962,9 @@
                 <a:solidFill>
                   <a:srgbClr val="0F172A"/>
                 </a:solidFill>
-                <a:latin typeface="맑은 고딕"/>
-                <a:ea typeface="맑은 고딕"/>
+                <a:latin typeface="Arial"/>
+                <a:ea typeface="맑은 고딕"/>
+                <a:cs typeface="Arial"/>
               </a:rPr>
               <a:t>planit-db 명명 볼륨으로 데이터 영속</a:t>
             </a:r>
@@ -13628,8 +13980,9 @@
                 <a:solidFill>
                   <a:srgbClr val="1D4ED8"/>
                 </a:solidFill>
-                <a:latin typeface="맑은 고딕"/>
-                <a:ea typeface="맑은 고딕"/>
+                <a:latin typeface="Arial"/>
+                <a:ea typeface="맑은 고딕"/>
+                <a:cs typeface="Arial"/>
               </a:rPr>
               <a:t>Port isolation  </a:t>
             </a:r>
@@ -13638,8 +13991,9 @@
                 <a:solidFill>
                   <a:srgbClr val="0F172A"/>
                 </a:solidFill>
-                <a:latin typeface="맑은 고딕"/>
-                <a:ea typeface="맑은 고딕"/>
+                <a:latin typeface="Arial"/>
+                <a:ea typeface="맑은 고딕"/>
+                <a:cs typeface="Arial"/>
               </a:rPr>
               <a:t>호스트 5434 매핑 → 호스트 Postgres 충돌 회피</a:t>
             </a:r>
@@ -13674,8 +14028,9 @@
                 <a:solidFill>
                   <a:srgbClr val="475569"/>
                 </a:solidFill>
-                <a:latin typeface="맑은 고딕"/>
-                <a:ea typeface="맑은 고딕"/>
+                <a:latin typeface="Arial"/>
+                <a:ea typeface="맑은 고딕"/>
+                <a:cs typeface="Arial"/>
               </a:rPr>
               <a:t>PlanIt — 2026-1 Web Programming Final Project · 202100580 이정</a:t>
             </a:r>
@@ -13710,8 +14065,9 @@
                 <a:solidFill>
                   <a:srgbClr val="475569"/>
                 </a:solidFill>
-                <a:latin typeface="맑은 고딕"/>
-                <a:ea typeface="맑은 고딕"/>
+                <a:latin typeface="Arial"/>
+                <a:ea typeface="맑은 고딕"/>
+                <a:cs typeface="Arial"/>
               </a:rPr>
               <a:t>8 / 13</a:t>
             </a:r>
@@ -13807,8 +14163,9 @@
                 <a:solidFill>
                   <a:srgbClr val="FFFFFF"/>
                 </a:solidFill>
-                <a:latin typeface="맑은 고딕"/>
-                <a:ea typeface="맑은 고딕"/>
+                <a:latin typeface="Arial"/>
+                <a:ea typeface="맑은 고딕"/>
+                <a:cs typeface="Arial"/>
               </a:rPr>
               <a:t>Nginx 리버스 프록시</a:t>
             </a:r>
@@ -13843,8 +14200,9 @@
                 <a:solidFill>
                   <a:srgbClr val="CBD5E1"/>
                 </a:solidFill>
-                <a:latin typeface="맑은 고딕"/>
-                <a:ea typeface="맑은 고딕"/>
+                <a:latin typeface="Arial"/>
+                <a:ea typeface="맑은 고딕"/>
+                <a:cs typeface="Arial"/>
               </a:rPr>
               <a:t>조건 ② — 정적 자원 + API 를 같은 출처에서 서비스</a:t>
             </a:r>
@@ -13879,8 +14237,9 @@
                 <a:solidFill>
                   <a:srgbClr val="CBD5E1"/>
                 </a:solidFill>
-                <a:latin typeface="맑은 고딕"/>
-                <a:ea typeface="맑은 고딕"/>
+                <a:latin typeface="Arial"/>
+                <a:ea typeface="맑은 고딕"/>
+                <a:cs typeface="Arial"/>
               </a:rPr>
               <a:t>9 / 13</a:t>
             </a:r>
@@ -13958,8 +14317,9 @@
                 <a:solidFill>
                   <a:srgbClr val="F59E0B"/>
                 </a:solidFill>
-                <a:latin typeface="맑은 고딕"/>
-                <a:ea typeface="맑은 고딕"/>
+                <a:latin typeface="Arial"/>
+                <a:ea typeface="맑은 고딕"/>
+                <a:cs typeface="Arial"/>
               </a:rPr>
               <a:t>docker/nginx.conf 핵심</a:t>
             </a:r>
@@ -14000,6 +14360,7 @@
                 </a:solidFill>
                 <a:latin typeface="Consolas"/>
                 <a:ea typeface="Consolas"/>
+                <a:cs typeface="Consolas"/>
               </a:rPr>
               <a:t>server {</a:t>
             </a:r>
@@ -14017,6 +14378,7 @@
                 </a:solidFill>
                 <a:latin typeface="Consolas"/>
                 <a:ea typeface="Consolas"/>
+                <a:cs typeface="Consolas"/>
               </a:rPr>
               <a:t>    listen 80;</a:t>
             </a:r>
@@ -14034,6 +14396,7 @@
                 </a:solidFill>
                 <a:latin typeface="Consolas"/>
                 <a:ea typeface="Consolas"/>
+                <a:cs typeface="Consolas"/>
               </a:rPr>
               <a:t>    gzip on;</a:t>
             </a:r>
@@ -14051,6 +14414,7 @@
                 </a:solidFill>
                 <a:latin typeface="Consolas"/>
                 <a:ea typeface="Consolas"/>
+                <a:cs typeface="Consolas"/>
               </a:rPr>
               <a:t>    gzip_types text/css application/javascript application/json image/svg+xml;</a:t>
             </a:r>
@@ -14068,6 +14432,7 @@
                 </a:solidFill>
                 <a:latin typeface="Consolas"/>
                 <a:ea typeface="Consolas"/>
+                <a:cs typeface="Consolas"/>
               </a:rPr>
               <a:t/>
             </a:r>
@@ -14085,6 +14450,7 @@
                 </a:solidFill>
                 <a:latin typeface="Consolas"/>
                 <a:ea typeface="Consolas"/>
+                <a:cs typeface="Consolas"/>
               </a:rPr>
               <a:t>    # API 리버스 프록시 (같은 출처 → CORS 회피)</a:t>
             </a:r>
@@ -14102,6 +14468,7 @@
                 </a:solidFill>
                 <a:latin typeface="Consolas"/>
                 <a:ea typeface="Consolas"/>
+                <a:cs typeface="Consolas"/>
               </a:rPr>
               <a:t>    location /api/ {</a:t>
             </a:r>
@@ -14119,6 +14486,7 @@
                 </a:solidFill>
                 <a:latin typeface="Consolas"/>
                 <a:ea typeface="Consolas"/>
+                <a:cs typeface="Consolas"/>
               </a:rPr>
               <a:t>        proxy_pass http://api:4000;</a:t>
             </a:r>
@@ -14136,6 +14504,7 @@
                 </a:solidFill>
                 <a:latin typeface="Consolas"/>
                 <a:ea typeface="Consolas"/>
+                <a:cs typeface="Consolas"/>
               </a:rPr>
               <a:t>        proxy_set_header X-Real-IP $remote_addr;</a:t>
             </a:r>
@@ -14153,6 +14522,7 @@
                 </a:solidFill>
                 <a:latin typeface="Consolas"/>
                 <a:ea typeface="Consolas"/>
+                <a:cs typeface="Consolas"/>
               </a:rPr>
               <a:t>        proxy_set_header X-Forwarded-For $proxy_add_x_forwarded_for;</a:t>
             </a:r>
@@ -14170,6 +14540,7 @@
                 </a:solidFill>
                 <a:latin typeface="Consolas"/>
                 <a:ea typeface="Consolas"/>
+                <a:cs typeface="Consolas"/>
               </a:rPr>
               <a:t>    }</a:t>
             </a:r>
@@ -14187,6 +14558,7 @@
                 </a:solidFill>
                 <a:latin typeface="Consolas"/>
                 <a:ea typeface="Consolas"/>
+                <a:cs typeface="Consolas"/>
               </a:rPr>
               <a:t/>
             </a:r>
@@ -14204,6 +14576,7 @@
                 </a:solidFill>
                 <a:latin typeface="Consolas"/>
                 <a:ea typeface="Consolas"/>
+                <a:cs typeface="Consolas"/>
               </a:rPr>
               <a:t>    # 정적 자원: 1년 immutable 캐시</a:t>
             </a:r>
@@ -14221,6 +14594,7 @@
                 </a:solidFill>
                 <a:latin typeface="Consolas"/>
                 <a:ea typeface="Consolas"/>
+                <a:cs typeface="Consolas"/>
               </a:rPr>
               <a:t>    location /assets/ {</a:t>
             </a:r>
@@ -14238,6 +14612,7 @@
                 </a:solidFill>
                 <a:latin typeface="Consolas"/>
                 <a:ea typeface="Consolas"/>
+                <a:cs typeface="Consolas"/>
               </a:rPr>
               <a:t>        add_header Cache-Control "public, max-age=31536000, immutable";</a:t>
             </a:r>
@@ -14255,6 +14630,7 @@
                 </a:solidFill>
                 <a:latin typeface="Consolas"/>
                 <a:ea typeface="Consolas"/>
+                <a:cs typeface="Consolas"/>
               </a:rPr>
               <a:t>        try_files $uri =404;</a:t>
             </a:r>
@@ -14272,6 +14648,7 @@
                 </a:solidFill>
                 <a:latin typeface="Consolas"/>
                 <a:ea typeface="Consolas"/>
+                <a:cs typeface="Consolas"/>
               </a:rPr>
               <a:t>    }</a:t>
             </a:r>
@@ -14289,6 +14666,7 @@
                 </a:solidFill>
                 <a:latin typeface="Consolas"/>
                 <a:ea typeface="Consolas"/>
+                <a:cs typeface="Consolas"/>
               </a:rPr>
               <a:t/>
             </a:r>
@@ -14306,6 +14684,7 @@
                 </a:solidFill>
                 <a:latin typeface="Consolas"/>
                 <a:ea typeface="Consolas"/>
+                <a:cs typeface="Consolas"/>
               </a:rPr>
               <a:t>    # SPA fallback (react-router 새로고침 보장)</a:t>
             </a:r>
@@ -14323,6 +14702,7 @@
                 </a:solidFill>
                 <a:latin typeface="Consolas"/>
                 <a:ea typeface="Consolas"/>
+                <a:cs typeface="Consolas"/>
               </a:rPr>
               <a:t>    location / {</a:t>
             </a:r>
@@ -14340,6 +14720,7 @@
                 </a:solidFill>
                 <a:latin typeface="Consolas"/>
                 <a:ea typeface="Consolas"/>
+                <a:cs typeface="Consolas"/>
               </a:rPr>
               <a:t>        try_files $uri $uri/ /index.html;</a:t>
             </a:r>
@@ -14357,6 +14738,7 @@
                 </a:solidFill>
                 <a:latin typeface="Consolas"/>
                 <a:ea typeface="Consolas"/>
+                <a:cs typeface="Consolas"/>
               </a:rPr>
               <a:t>    }</a:t>
             </a:r>
@@ -14374,6 +14756,7 @@
                 </a:solidFill>
                 <a:latin typeface="Consolas"/>
                 <a:ea typeface="Consolas"/>
+                <a:cs typeface="Consolas"/>
               </a:rPr>
               <a:t>}</a:t>
             </a:r>
@@ -14453,8 +14836,9 @@
                 <a:solidFill>
                   <a:srgbClr val="1D4ED8"/>
                 </a:solidFill>
-                <a:latin typeface="맑은 고딕"/>
-                <a:ea typeface="맑은 고딕"/>
+                <a:latin typeface="Arial"/>
+                <a:ea typeface="맑은 고딕"/>
+                <a:cs typeface="Arial"/>
               </a:rPr>
               <a:t>🎯 얻은 효과</a:t>
             </a:r>
@@ -14493,8 +14877,9 @@
                 <a:solidFill>
                   <a:srgbClr val="1D4ED8"/>
                 </a:solidFill>
-                <a:latin typeface="맑은 고딕"/>
-                <a:ea typeface="맑은 고딕"/>
+                <a:latin typeface="Arial"/>
+                <a:ea typeface="맑은 고딕"/>
+                <a:cs typeface="Arial"/>
               </a:rPr>
               <a:t>같은 Origin  </a:t>
             </a:r>
@@ -14503,8 +14888,9 @@
                 <a:solidFill>
                   <a:srgbClr val="0F172A"/>
                 </a:solidFill>
-                <a:latin typeface="맑은 고딕"/>
-                <a:ea typeface="맑은 고딕"/>
+                <a:latin typeface="Arial"/>
+                <a:ea typeface="맑은 고딕"/>
+                <a:cs typeface="Arial"/>
               </a:rPr>
               <a:t>CORS preflight 불필요</a:t>
             </a:r>
@@ -14520,8 +14906,9 @@
                 <a:solidFill>
                   <a:srgbClr val="1D4ED8"/>
                 </a:solidFill>
-                <a:latin typeface="맑은 고딕"/>
-                <a:ea typeface="맑은 고딕"/>
+                <a:latin typeface="Arial"/>
+                <a:ea typeface="맑은 고딕"/>
+                <a:cs typeface="Arial"/>
               </a:rPr>
               <a:t>gzip  </a:t>
             </a:r>
@@ -14530,8 +14917,9 @@
                 <a:solidFill>
                   <a:srgbClr val="0F172A"/>
                 </a:solidFill>
-                <a:latin typeface="맑은 고딕"/>
-                <a:ea typeface="맑은 고딕"/>
+                <a:latin typeface="Arial"/>
+                <a:ea typeface="맑은 고딕"/>
+                <a:cs typeface="Arial"/>
               </a:rPr>
               <a:t>JS 429KB → 138KB (전송량 -68%)</a:t>
             </a:r>
@@ -14547,8 +14935,9 @@
                 <a:solidFill>
                   <a:srgbClr val="1D4ED8"/>
                 </a:solidFill>
-                <a:latin typeface="맑은 고딕"/>
-                <a:ea typeface="맑은 고딕"/>
+                <a:latin typeface="Arial"/>
+                <a:ea typeface="맑은 고딕"/>
+                <a:cs typeface="Arial"/>
               </a:rPr>
               <a:t>immutable  </a:t>
             </a:r>
@@ -14557,8 +14946,9 @@
                 <a:solidFill>
                   <a:srgbClr val="0F172A"/>
                 </a:solidFill>
-                <a:latin typeface="맑은 고딕"/>
-                <a:ea typeface="맑은 고딕"/>
+                <a:latin typeface="Arial"/>
+                <a:ea typeface="맑은 고딕"/>
+                <a:cs typeface="Arial"/>
               </a:rPr>
               <a:t>재방문 시 자산 0 byte 다운로드</a:t>
             </a:r>
@@ -14574,8 +14964,9 @@
                 <a:solidFill>
                   <a:srgbClr val="1D4ED8"/>
                 </a:solidFill>
-                <a:latin typeface="맑은 고딕"/>
-                <a:ea typeface="맑은 고딕"/>
+                <a:latin typeface="Arial"/>
+                <a:ea typeface="맑은 고딕"/>
+                <a:cs typeface="Arial"/>
               </a:rPr>
               <a:t>SPA fallback  </a:t>
             </a:r>
@@ -14584,8 +14975,9 @@
                 <a:solidFill>
                   <a:srgbClr val="0F172A"/>
                 </a:solidFill>
-                <a:latin typeface="맑은 고딕"/>
-                <a:ea typeface="맑은 고딕"/>
+                <a:latin typeface="Arial"/>
+                <a:ea typeface="맑은 고딕"/>
+                <a:cs typeface="Arial"/>
               </a:rPr>
               <a:t>/calendar 직접 새로고침해도 200</a:t>
             </a:r>
@@ -14601,8 +14993,9 @@
                 <a:solidFill>
                   <a:srgbClr val="1D4ED8"/>
                 </a:solidFill>
-                <a:latin typeface="맑은 고딕"/>
-                <a:ea typeface="맑은 고딕"/>
+                <a:latin typeface="Arial"/>
+                <a:ea typeface="맑은 고딕"/>
+                <a:cs typeface="Arial"/>
               </a:rPr>
               <a:t>X-Forwarded  </a:t>
             </a:r>
@@ -14611,8 +15004,9 @@
                 <a:solidFill>
                   <a:srgbClr val="0F172A"/>
                 </a:solidFill>
-                <a:latin typeface="맑은 고딕"/>
-                <a:ea typeface="맑은 고딕"/>
+                <a:latin typeface="Arial"/>
+                <a:ea typeface="맑은 고딕"/>
+                <a:cs typeface="Arial"/>
               </a:rPr>
               <a:t>백엔드에서 원본 IP 식별 가능</a:t>
             </a:r>
@@ -14628,8 +15022,9 @@
                 <a:solidFill>
                   <a:srgbClr val="1D4ED8"/>
                 </a:solidFill>
-                <a:latin typeface="맑은 고딕"/>
-                <a:ea typeface="맑은 고딕"/>
+                <a:latin typeface="Arial"/>
+                <a:ea typeface="맑은 고딕"/>
+                <a:cs typeface="Arial"/>
               </a:rPr>
               <a:t>HTTPS 전담  </a:t>
             </a:r>
@@ -14638,8 +15033,9 @@
                 <a:solidFill>
                   <a:srgbClr val="0F172A"/>
                 </a:solidFill>
-                <a:latin typeface="맑은 고딕"/>
-                <a:ea typeface="맑은 고딕"/>
+                <a:latin typeface="Arial"/>
+                <a:ea typeface="맑은 고딕"/>
+                <a:cs typeface="Arial"/>
               </a:rPr>
               <a:t>운영 환경에서 TLS 처리 Nginx 단계 집중</a:t>
             </a:r>
@@ -14674,8 +15070,9 @@
                 <a:solidFill>
                   <a:srgbClr val="475569"/>
                 </a:solidFill>
-                <a:latin typeface="맑은 고딕"/>
-                <a:ea typeface="맑은 고딕"/>
+                <a:latin typeface="Arial"/>
+                <a:ea typeface="맑은 고딕"/>
+                <a:cs typeface="Arial"/>
               </a:rPr>
               <a:t>PlanIt — 2026-1 Web Programming Final Project · 202100580 이정</a:t>
             </a:r>
@@ -14710,8 +15107,9 @@
                 <a:solidFill>
                   <a:srgbClr val="475569"/>
                 </a:solidFill>
-                <a:latin typeface="맑은 고딕"/>
-                <a:ea typeface="맑은 고딕"/>
+                <a:latin typeface="Arial"/>
+                <a:ea typeface="맑은 고딕"/>
+                <a:cs typeface="Arial"/>
               </a:rPr>
               <a:t>9 / 13</a:t>
             </a:r>
